--- a/Mobile Game Development Presentation.pptx
+++ b/Mobile Game Development Presentation.pptx
@@ -11,6 +11,7 @@
     <p:sldId id="259" r:id="rId5"/>
     <p:sldId id="260" r:id="rId6"/>
     <p:sldId id="261" r:id="rId7"/>
+    <p:sldId id="262" r:id="rId8"/>
   </p:sldIdLst>
   <p:sldSz cx="12192000" cy="6858000"/>
   <p:notesSz cx="6858000" cy="9144000"/>
@@ -109,6 +110,11 @@
       </a:defRPr>
     </a:lvl9pPr>
   </p:defaultTextStyle>
+  <p:extLst>
+    <p:ext uri="{EFAFB233-063F-42B5-8137-9DF3F51BA10A}">
+      <p15:sldGuideLst xmlns:p15="http://schemas.microsoft.com/office/powerpoint/2012/main"/>
+    </p:ext>
+  </p:extLst>
 </p:presentation>
 </file>
 
@@ -261,7 +267,7 @@
           <a:p>
             <a:fld id="{2A888B40-8E80-4791-BA32-6A3D7E3A79C3}" type="datetimeFigureOut">
               <a:rPr lang="en-GB" smtClean="0"/>
-              <a:t>16/10/2025</a:t>
+              <a:t>03/01/2026</a:t>
             </a:fld>
             <a:endParaRPr lang="en-GB"/>
           </a:p>
@@ -461,7 +467,7 @@
           <a:p>
             <a:fld id="{2A888B40-8E80-4791-BA32-6A3D7E3A79C3}" type="datetimeFigureOut">
               <a:rPr lang="en-GB" smtClean="0"/>
-              <a:t>16/10/2025</a:t>
+              <a:t>03/01/2026</a:t>
             </a:fld>
             <a:endParaRPr lang="en-GB"/>
           </a:p>
@@ -671,7 +677,7 @@
           <a:p>
             <a:fld id="{2A888B40-8E80-4791-BA32-6A3D7E3A79C3}" type="datetimeFigureOut">
               <a:rPr lang="en-GB" smtClean="0"/>
-              <a:t>16/10/2025</a:t>
+              <a:t>03/01/2026</a:t>
             </a:fld>
             <a:endParaRPr lang="en-GB"/>
           </a:p>
@@ -871,7 +877,7 @@
           <a:p>
             <a:fld id="{2A888B40-8E80-4791-BA32-6A3D7E3A79C3}" type="datetimeFigureOut">
               <a:rPr lang="en-GB" smtClean="0"/>
-              <a:t>16/10/2025</a:t>
+              <a:t>03/01/2026</a:t>
             </a:fld>
             <a:endParaRPr lang="en-GB"/>
           </a:p>
@@ -1147,7 +1153,7 @@
           <a:p>
             <a:fld id="{2A888B40-8E80-4791-BA32-6A3D7E3A79C3}" type="datetimeFigureOut">
               <a:rPr lang="en-GB" smtClean="0"/>
-              <a:t>16/10/2025</a:t>
+              <a:t>03/01/2026</a:t>
             </a:fld>
             <a:endParaRPr lang="en-GB"/>
           </a:p>
@@ -1415,7 +1421,7 @@
           <a:p>
             <a:fld id="{2A888B40-8E80-4791-BA32-6A3D7E3A79C3}" type="datetimeFigureOut">
               <a:rPr lang="en-GB" smtClean="0"/>
-              <a:t>16/10/2025</a:t>
+              <a:t>03/01/2026</a:t>
             </a:fld>
             <a:endParaRPr lang="en-GB"/>
           </a:p>
@@ -1830,7 +1836,7 @@
           <a:p>
             <a:fld id="{2A888B40-8E80-4791-BA32-6A3D7E3A79C3}" type="datetimeFigureOut">
               <a:rPr lang="en-GB" smtClean="0"/>
-              <a:t>16/10/2025</a:t>
+              <a:t>03/01/2026</a:t>
             </a:fld>
             <a:endParaRPr lang="en-GB"/>
           </a:p>
@@ -1972,7 +1978,7 @@
           <a:p>
             <a:fld id="{2A888B40-8E80-4791-BA32-6A3D7E3A79C3}" type="datetimeFigureOut">
               <a:rPr lang="en-GB" smtClean="0"/>
-              <a:t>16/10/2025</a:t>
+              <a:t>03/01/2026</a:t>
             </a:fld>
             <a:endParaRPr lang="en-GB"/>
           </a:p>
@@ -2085,7 +2091,7 @@
           <a:p>
             <a:fld id="{2A888B40-8E80-4791-BA32-6A3D7E3A79C3}" type="datetimeFigureOut">
               <a:rPr lang="en-GB" smtClean="0"/>
-              <a:t>16/10/2025</a:t>
+              <a:t>03/01/2026</a:t>
             </a:fld>
             <a:endParaRPr lang="en-GB"/>
           </a:p>
@@ -2398,7 +2404,7 @@
           <a:p>
             <a:fld id="{2A888B40-8E80-4791-BA32-6A3D7E3A79C3}" type="datetimeFigureOut">
               <a:rPr lang="en-GB" smtClean="0"/>
-              <a:t>16/10/2025</a:t>
+              <a:t>03/01/2026</a:t>
             </a:fld>
             <a:endParaRPr lang="en-GB"/>
           </a:p>
@@ -2687,7 +2693,7 @@
           <a:p>
             <a:fld id="{2A888B40-8E80-4791-BA32-6A3D7E3A79C3}" type="datetimeFigureOut">
               <a:rPr lang="en-GB" smtClean="0"/>
-              <a:t>16/10/2025</a:t>
+              <a:t>03/01/2026</a:t>
             </a:fld>
             <a:endParaRPr lang="en-GB"/>
           </a:p>
@@ -2930,7 +2936,7 @@
           <a:p>
             <a:fld id="{2A888B40-8E80-4791-BA32-6A3D7E3A79C3}" type="datetimeFigureOut">
               <a:rPr lang="en-GB" smtClean="0"/>
-              <a:t>16/10/2025</a:t>
+              <a:t>03/01/2026</a:t>
             </a:fld>
             <a:endParaRPr lang="en-GB"/>
           </a:p>
@@ -3836,7 +3842,7 @@
           <a:p>
             <a:r>
               <a:rPr lang="en-GB" dirty="0"/>
-              <a:t>Advanced features</a:t>
+              <a:t>Phone Sensors</a:t>
             </a:r>
           </a:p>
         </p:txBody>
@@ -3864,25 +3870,19 @@
           <a:p>
             <a:r>
               <a:rPr lang="en-GB" dirty="0"/>
-              <a:t>Game will include mini games that will rely on unique mechanics such as the phone's gyro or accelerometer.</a:t>
+              <a:t>Accelerometer used for the cow minigame whereby you must shake the phone to milk the cow.</a:t>
             </a:r>
           </a:p>
           <a:p>
             <a:r>
               <a:rPr lang="en-GB" dirty="0"/>
-              <a:t>Users will be allowed to view their farm in AR.</a:t>
+              <a:t>Gyro is used for the chicken minigame whereby the player tilts the basket to catch the eggs</a:t>
             </a:r>
           </a:p>
           <a:p>
             <a:r>
               <a:rPr lang="en-GB" dirty="0"/>
-              <a:t>Ads will be utilised for a method of monetisation.</a:t>
-            </a:r>
-          </a:p>
-          <a:p>
-            <a:r>
-              <a:rPr lang="en-GB" dirty="0"/>
-              <a:t>It will also include a premium currency which can be bought with real money – microtransactions.</a:t>
+              <a:t>Microphone is used for the sheep minigame whereby the player blows into the mic to strip the wool.</a:t>
             </a:r>
           </a:p>
           <a:p>
@@ -3943,7 +3943,7 @@
           <a:p>
             <a:r>
               <a:rPr lang="en-GB" dirty="0"/>
-              <a:t>UI</a:t>
+              <a:t>Frameworks used</a:t>
             </a:r>
           </a:p>
         </p:txBody>
@@ -3966,24 +3966,89 @@
         </p:nvSpPr>
         <p:spPr/>
         <p:txBody>
-          <a:bodyPr/>
-          <a:lstStyle/>
-          <a:p>
+          <a:bodyPr>
+            <a:normAutofit lnSpcReduction="10000"/>
+          </a:bodyPr>
+          <a:lstStyle/>
+          <a:p>
+            <a:pPr marL="0" indent="0">
+              <a:buNone/>
+            </a:pPr>
             <a:r>
               <a:rPr lang="en-GB" dirty="0"/>
-              <a:t>Game will first open with a loading screen that will be immersive and interactive to draw the user in.</a:t>
-            </a:r>
-          </a:p>
-          <a:p>
+              <a:t>The game uses unity ads within the game. </a:t>
+            </a:r>
+          </a:p>
+          <a:p>
+            <a:pPr marL="0" indent="0">
+              <a:buNone/>
+            </a:pPr>
             <a:r>
               <a:rPr lang="en-GB" dirty="0"/>
-              <a:t>The game will use bright colour palates to keep the game visually pleasing.</a:t>
-            </a:r>
-          </a:p>
-          <a:p>
+              <a:t>	Banner ads in inventory</a:t>
+            </a:r>
+          </a:p>
+          <a:p>
+            <a:pPr marL="0" indent="0">
+              <a:buNone/>
+            </a:pPr>
             <a:r>
               <a:rPr lang="en-GB" dirty="0"/>
-              <a:t>Everything in the farm will be interactive when pressed. </a:t>
+              <a:t>	Rewarded ads for minigame tokens</a:t>
+            </a:r>
+          </a:p>
+          <a:p>
+            <a:pPr marL="0" indent="0">
+              <a:buNone/>
+            </a:pPr>
+            <a:r>
+              <a:rPr lang="en-GB" dirty="0"/>
+              <a:t>	Interstitial ads for collecting items</a:t>
+            </a:r>
+          </a:p>
+          <a:p>
+            <a:pPr marL="0" indent="0">
+              <a:buNone/>
+            </a:pPr>
+            <a:r>
+              <a:rPr lang="en-GB" dirty="0"/>
+              <a:t>Microtransactions have been added to the game.</a:t>
+            </a:r>
+          </a:p>
+          <a:p>
+            <a:pPr marL="0" indent="0">
+              <a:buNone/>
+            </a:pPr>
+            <a:r>
+              <a:rPr lang="en-GB" dirty="0"/>
+              <a:t>	Purchase premium currency (consumable)</a:t>
+            </a:r>
+          </a:p>
+          <a:p>
+            <a:pPr marL="0" indent="0">
+              <a:buNone/>
+            </a:pPr>
+            <a:r>
+              <a:rPr lang="en-GB" dirty="0"/>
+              <a:t>	Purchase no ads option (non-consumable)</a:t>
+            </a:r>
+          </a:p>
+          <a:p>
+            <a:pPr marL="0" indent="0">
+              <a:buNone/>
+            </a:pPr>
+            <a:r>
+              <a:rPr lang="en-GB" dirty="0"/>
+              <a:t>Third party vibrations</a:t>
+            </a:r>
+          </a:p>
+          <a:p>
+            <a:pPr marL="0" indent="0">
+              <a:buNone/>
+            </a:pPr>
+            <a:r>
+              <a:rPr lang="en-GB" dirty="0"/>
+              <a:t>	When completing a minigame there</a:t>
             </a:r>
           </a:p>
         </p:txBody>
@@ -3992,6 +4057,98 @@
     <p:extLst>
       <p:ext uri="{BB962C8B-B14F-4D97-AF65-F5344CB8AC3E}">
         <p14:creationId xmlns:p14="http://schemas.microsoft.com/office/powerpoint/2010/main" val="2763707270"/>
+      </p:ext>
+    </p:extLst>
+  </p:cSld>
+  <p:clrMapOvr>
+    <a:masterClrMapping/>
+  </p:clrMapOvr>
+</p:sld>
+</file>
+
+<file path=ppt/slides/slide7.xml><?xml version="1.0" encoding="utf-8"?>
+<p:sld xmlns:a="http://schemas.openxmlformats.org/drawingml/2006/main" xmlns:r="http://schemas.openxmlformats.org/officeDocument/2006/relationships" xmlns:p="http://schemas.openxmlformats.org/presentationml/2006/main">
+  <p:cSld>
+    <p:spTree>
+      <p:nvGrpSpPr>
+        <p:cNvPr id="1" name=""/>
+        <p:cNvGrpSpPr/>
+        <p:nvPr/>
+      </p:nvGrpSpPr>
+      <p:grpSpPr>
+        <a:xfrm>
+          <a:off x="0" y="0"/>
+          <a:ext cx="0" cy="0"/>
+          <a:chOff x="0" y="0"/>
+          <a:chExt cx="0" cy="0"/>
+        </a:xfrm>
+      </p:grpSpPr>
+      <p:sp>
+        <p:nvSpPr>
+          <p:cNvPr id="2" name="Title 1">
+            <a:extLst>
+              <a:ext uri="{FF2B5EF4-FFF2-40B4-BE49-F238E27FC236}">
+                <a16:creationId xmlns:a16="http://schemas.microsoft.com/office/drawing/2014/main" id="{5E8A5F9F-7EEC-6CA0-93A2-D66FF23CD3E6}"/>
+              </a:ext>
+            </a:extLst>
+          </p:cNvPr>
+          <p:cNvSpPr>
+            <a:spLocks noGrp="1"/>
+          </p:cNvSpPr>
+          <p:nvPr>
+            <p:ph type="title"/>
+          </p:nvPr>
+        </p:nvSpPr>
+        <p:spPr/>
+        <p:txBody>
+          <a:bodyPr/>
+          <a:lstStyle/>
+          <a:p>
+            <a:r>
+              <a:rPr lang="en-GB" dirty="0"/>
+              <a:t>Publication</a:t>
+            </a:r>
+          </a:p>
+        </p:txBody>
+      </p:sp>
+      <p:sp>
+        <p:nvSpPr>
+          <p:cNvPr id="3" name="Content Placeholder 2">
+            <a:extLst>
+              <a:ext uri="{FF2B5EF4-FFF2-40B4-BE49-F238E27FC236}">
+                <a16:creationId xmlns:a16="http://schemas.microsoft.com/office/drawing/2014/main" id="{B3FF8B69-59D1-2006-5EAA-EC5B6A63A90B}"/>
+              </a:ext>
+            </a:extLst>
+          </p:cNvPr>
+          <p:cNvSpPr>
+            <a:spLocks noGrp="1"/>
+          </p:cNvSpPr>
+          <p:nvPr>
+            <p:ph idx="1"/>
+          </p:nvPr>
+        </p:nvSpPr>
+        <p:spPr/>
+        <p:txBody>
+          <a:bodyPr/>
+          <a:lstStyle/>
+          <a:p>
+            <a:r>
+              <a:rPr lang="en-GB" dirty="0"/>
+              <a:t>Itch.io the game has been published on this platform </a:t>
+            </a:r>
+          </a:p>
+          <a:p>
+            <a:r>
+              <a:rPr lang="en-GB" dirty="0"/>
+              <a:t>The game is within the testing phase on the google play console</a:t>
+            </a:r>
+          </a:p>
+        </p:txBody>
+      </p:sp>
+    </p:spTree>
+    <p:extLst>
+      <p:ext uri="{BB962C8B-B14F-4D97-AF65-F5344CB8AC3E}">
+        <p14:creationId xmlns:p14="http://schemas.microsoft.com/office/powerpoint/2010/main" val="3458744442"/>
       </p:ext>
     </p:extLst>
   </p:cSld>

--- a/Mobile Game Development Presentation.pptx
+++ b/Mobile Game Development Presentation.pptx
@@ -3658,6 +3658,14 @@
 <file path=ppt/slides/slide4.xml><?xml version="1.0" encoding="utf-8"?>
 <p:sld xmlns:a="http://schemas.openxmlformats.org/drawingml/2006/main" xmlns:r="http://schemas.openxmlformats.org/officeDocument/2006/relationships" xmlns:p="http://schemas.openxmlformats.org/presentationml/2006/main">
   <p:cSld>
+    <p:bg>
+      <p:bgPr>
+        <a:solidFill>
+          <a:schemeClr val="bg1"/>
+        </a:solidFill>
+        <a:effectLst/>
+      </p:bgPr>
+    </p:bg>
     <p:spTree>
       <p:nvGrpSpPr>
         <p:cNvPr id="1" name=""/>
@@ -3672,6 +3680,470 @@
           <a:chExt cx="0" cy="0"/>
         </a:xfrm>
       </p:grpSpPr>
+      <p:sp useBgFill="1">
+        <p:nvSpPr>
+          <p:cNvPr id="13" name="Rectangle 12">
+            <a:extLst>
+              <a:ext uri="{FF2B5EF4-FFF2-40B4-BE49-F238E27FC236}">
+                <a16:creationId xmlns:a16="http://schemas.microsoft.com/office/drawing/2014/main" id="{F1E7273E-E5A3-4B1D-BE3E-56F045D92700}"/>
+              </a:ext>
+              <a:ext uri="{C183D7F6-B498-43B3-948B-1728B52AA6E4}">
+                <adec:decorative xmlns:adec="http://schemas.microsoft.com/office/drawing/2017/decorative" val="1"/>
+              </a:ext>
+            </a:extLst>
+          </p:cNvPr>
+          <p:cNvSpPr>
+            <a:spLocks noGrp="1" noRot="1" noChangeAspect="1" noMove="1" noResize="1" noEditPoints="1" noAdjustHandles="1" noChangeArrowheads="1" noChangeShapeType="1" noTextEdit="1"/>
+          </p:cNvSpPr>
+          <p:nvPr>
+            <p:extLst>
+              <p:ext uri="{386F3935-93C4-4BCD-93E2-E3B085C9AB24}">
+                <p16:designElem xmlns:p16="http://schemas.microsoft.com/office/powerpoint/2015/main" val="1"/>
+              </p:ext>
+            </p:extLst>
+          </p:nvPr>
+        </p:nvSpPr>
+        <p:spPr>
+          <a:xfrm>
+            <a:off x="0" y="0"/>
+            <a:ext cx="12188952" cy="6858000"/>
+          </a:xfrm>
+          <a:prstGeom prst="rect">
+            <a:avLst/>
+          </a:prstGeom>
+          <a:ln>
+            <a:noFill/>
+          </a:ln>
+        </p:spPr>
+        <p:style>
+          <a:lnRef idx="2">
+            <a:schemeClr val="accent1">
+              <a:shade val="50000"/>
+            </a:schemeClr>
+          </a:lnRef>
+          <a:fillRef idx="1">
+            <a:schemeClr val="accent1"/>
+          </a:fillRef>
+          <a:effectRef idx="0">
+            <a:schemeClr val="accent1"/>
+          </a:effectRef>
+          <a:fontRef idx="minor">
+            <a:schemeClr val="lt1"/>
+          </a:fontRef>
+        </p:style>
+        <p:txBody>
+          <a:bodyPr rtlCol="0" anchor="ctr"/>
+          <a:lstStyle/>
+          <a:p>
+            <a:pPr algn="ctr"/>
+            <a:endParaRPr lang="en-US"/>
+          </a:p>
+        </p:txBody>
+      </p:sp>
+      <p:sp>
+        <p:nvSpPr>
+          <p:cNvPr id="15" name="Freeform: Shape 14">
+            <a:extLst>
+              <a:ext uri="{FF2B5EF4-FFF2-40B4-BE49-F238E27FC236}">
+                <a16:creationId xmlns:a16="http://schemas.microsoft.com/office/drawing/2014/main" id="{9CF7FE1C-8BC5-4B0C-A2BC-93AB72C90FDD}"/>
+              </a:ext>
+              <a:ext uri="{C183D7F6-B498-43B3-948B-1728B52AA6E4}">
+                <adec:decorative xmlns:adec="http://schemas.microsoft.com/office/drawing/2017/decorative" val="1"/>
+              </a:ext>
+            </a:extLst>
+          </p:cNvPr>
+          <p:cNvSpPr>
+            <a:spLocks noGrp="1" noRot="1" noChangeAspect="1" noMove="1" noResize="1" noEditPoints="1" noAdjustHandles="1" noChangeArrowheads="1" noChangeShapeType="1" noTextEdit="1"/>
+          </p:cNvSpPr>
+          <p:nvPr>
+            <p:extLst>
+              <p:ext uri="{386F3935-93C4-4BCD-93E2-E3B085C9AB24}">
+                <p16:designElem xmlns:p16="http://schemas.microsoft.com/office/powerpoint/2015/main" val="1"/>
+              </p:ext>
+            </p:extLst>
+          </p:nvPr>
+        </p:nvSpPr>
+        <p:spPr>
+          <a:xfrm>
+            <a:off x="1768100" y="-1"/>
+            <a:ext cx="10423900" cy="5920155"/>
+          </a:xfrm>
+          <a:custGeom>
+            <a:avLst/>
+            <a:gdLst>
+              <a:gd name="connsiteX0" fmla="*/ 10423900 w 10423900"/>
+              <a:gd name="connsiteY0" fmla="*/ 0 h 5491534"/>
+              <a:gd name="connsiteX1" fmla="*/ 3493157 w 10423900"/>
+              <a:gd name="connsiteY1" fmla="*/ 0 h 5491534"/>
+              <a:gd name="connsiteX2" fmla="*/ 3493018 w 10423900"/>
+              <a:gd name="connsiteY2" fmla="*/ 31 h 5491534"/>
+              <a:gd name="connsiteX3" fmla="*/ 3245493 w 10423900"/>
+              <a:gd name="connsiteY3" fmla="*/ 104839 h 5491534"/>
+              <a:gd name="connsiteX4" fmla="*/ 4434802 w 10423900"/>
+              <a:gd name="connsiteY4" fmla="*/ 284558 h 5491534"/>
+              <a:gd name="connsiteX5" fmla="*/ 4011937 w 10423900"/>
+              <a:gd name="connsiteY5" fmla="*/ 395559 h 5491534"/>
+              <a:gd name="connsiteX6" fmla="*/ 3573213 w 10423900"/>
+              <a:gd name="connsiteY6" fmla="*/ 474847 h 5491534"/>
+              <a:gd name="connsiteX7" fmla="*/ 3097489 w 10423900"/>
+              <a:gd name="connsiteY7" fmla="*/ 532990 h 5491534"/>
+              <a:gd name="connsiteX8" fmla="*/ 2664052 w 10423900"/>
+              <a:gd name="connsiteY8" fmla="*/ 649279 h 5491534"/>
+              <a:gd name="connsiteX9" fmla="*/ 3795218 w 10423900"/>
+              <a:gd name="connsiteY9" fmla="*/ 696852 h 5491534"/>
+              <a:gd name="connsiteX10" fmla="*/ 3208492 w 10423900"/>
+              <a:gd name="connsiteY10" fmla="*/ 802568 h 5491534"/>
+              <a:gd name="connsiteX11" fmla="*/ 2727483 w 10423900"/>
+              <a:gd name="connsiteY11" fmla="*/ 939999 h 5491534"/>
+              <a:gd name="connsiteX12" fmla="*/ 2389190 w 10423900"/>
+              <a:gd name="connsiteY12" fmla="*/ 1003429 h 5491534"/>
+              <a:gd name="connsiteX13" fmla="*/ 2029754 w 10423900"/>
+              <a:gd name="connsiteY13" fmla="*/ 1019287 h 5491534"/>
+              <a:gd name="connsiteX14" fmla="*/ 1945181 w 10423900"/>
+              <a:gd name="connsiteY14" fmla="*/ 1119716 h 5491534"/>
+              <a:gd name="connsiteX15" fmla="*/ 2056184 w 10423900"/>
+              <a:gd name="connsiteY15" fmla="*/ 1225434 h 5491534"/>
+              <a:gd name="connsiteX16" fmla="*/ 2225329 w 10423900"/>
+              <a:gd name="connsiteY16" fmla="*/ 1236004 h 5491534"/>
+              <a:gd name="connsiteX17" fmla="*/ 3234920 w 10423900"/>
+              <a:gd name="connsiteY17" fmla="*/ 1262435 h 5491534"/>
+              <a:gd name="connsiteX18" fmla="*/ 0 w 10423900"/>
+              <a:gd name="connsiteY18" fmla="*/ 1495009 h 5491534"/>
+              <a:gd name="connsiteX19" fmla="*/ 438724 w 10423900"/>
+              <a:gd name="connsiteY19" fmla="*/ 1637728 h 5491534"/>
+              <a:gd name="connsiteX20" fmla="*/ 586726 w 10423900"/>
+              <a:gd name="connsiteY20" fmla="*/ 2028877 h 5491534"/>
+              <a:gd name="connsiteX21" fmla="*/ 1125878 w 10423900"/>
+              <a:gd name="connsiteY21" fmla="*/ 2250882 h 5491534"/>
+              <a:gd name="connsiteX22" fmla="*/ 1474744 w 10423900"/>
+              <a:gd name="connsiteY22" fmla="*/ 2330169 h 5491534"/>
+              <a:gd name="connsiteX23" fmla="*/ 2272901 w 10423900"/>
+              <a:gd name="connsiteY23" fmla="*/ 2446458 h 5491534"/>
+              <a:gd name="connsiteX24" fmla="*/ 2389190 w 10423900"/>
+              <a:gd name="connsiteY24" fmla="*/ 2636747 h 5491534"/>
+              <a:gd name="connsiteX25" fmla="*/ 2489621 w 10423900"/>
+              <a:gd name="connsiteY25" fmla="*/ 2848179 h 5491534"/>
+              <a:gd name="connsiteX26" fmla="*/ 2701053 w 10423900"/>
+              <a:gd name="connsiteY26" fmla="*/ 2985611 h 5491534"/>
+              <a:gd name="connsiteX27" fmla="*/ 1057165 w 10423900"/>
+              <a:gd name="connsiteY27" fmla="*/ 2964468 h 5491534"/>
+              <a:gd name="connsiteX28" fmla="*/ 2912485 w 10423900"/>
+              <a:gd name="connsiteY28" fmla="*/ 3408477 h 5491534"/>
+              <a:gd name="connsiteX29" fmla="*/ 2748626 w 10423900"/>
+              <a:gd name="connsiteY29" fmla="*/ 3582909 h 5491534"/>
+              <a:gd name="connsiteX30" fmla="*/ 3763503 w 10423900"/>
+              <a:gd name="connsiteY30" fmla="*/ 3820771 h 5491534"/>
+              <a:gd name="connsiteX31" fmla="*/ 3219063 w 10423900"/>
+              <a:gd name="connsiteY31" fmla="*/ 3847199 h 5491534"/>
+              <a:gd name="connsiteX32" fmla="*/ 6385269 w 10423900"/>
+              <a:gd name="connsiteY32" fmla="*/ 4840933 h 5491534"/>
+              <a:gd name="connsiteX33" fmla="*/ 10285854 w 10423900"/>
+              <a:gd name="connsiteY33" fmla="*/ 5471118 h 5491534"/>
+              <a:gd name="connsiteX34" fmla="*/ 10423900 w 10423900"/>
+              <a:gd name="connsiteY34" fmla="*/ 5491534 h 5491534"/>
+            </a:gdLst>
+            <a:ahLst/>
+            <a:cxnLst>
+              <a:cxn ang="0">
+                <a:pos x="connsiteX0" y="connsiteY0"/>
+              </a:cxn>
+              <a:cxn ang="0">
+                <a:pos x="connsiteX1" y="connsiteY1"/>
+              </a:cxn>
+              <a:cxn ang="0">
+                <a:pos x="connsiteX2" y="connsiteY2"/>
+              </a:cxn>
+              <a:cxn ang="0">
+                <a:pos x="connsiteX3" y="connsiteY3"/>
+              </a:cxn>
+              <a:cxn ang="0">
+                <a:pos x="connsiteX4" y="connsiteY4"/>
+              </a:cxn>
+              <a:cxn ang="0">
+                <a:pos x="connsiteX5" y="connsiteY5"/>
+              </a:cxn>
+              <a:cxn ang="0">
+                <a:pos x="connsiteX6" y="connsiteY6"/>
+              </a:cxn>
+              <a:cxn ang="0">
+                <a:pos x="connsiteX7" y="connsiteY7"/>
+              </a:cxn>
+              <a:cxn ang="0">
+                <a:pos x="connsiteX8" y="connsiteY8"/>
+              </a:cxn>
+              <a:cxn ang="0">
+                <a:pos x="connsiteX9" y="connsiteY9"/>
+              </a:cxn>
+              <a:cxn ang="0">
+                <a:pos x="connsiteX10" y="connsiteY10"/>
+              </a:cxn>
+              <a:cxn ang="0">
+                <a:pos x="connsiteX11" y="connsiteY11"/>
+              </a:cxn>
+              <a:cxn ang="0">
+                <a:pos x="connsiteX12" y="connsiteY12"/>
+              </a:cxn>
+              <a:cxn ang="0">
+                <a:pos x="connsiteX13" y="connsiteY13"/>
+              </a:cxn>
+              <a:cxn ang="0">
+                <a:pos x="connsiteX14" y="connsiteY14"/>
+              </a:cxn>
+              <a:cxn ang="0">
+                <a:pos x="connsiteX15" y="connsiteY15"/>
+              </a:cxn>
+              <a:cxn ang="0">
+                <a:pos x="connsiteX16" y="connsiteY16"/>
+              </a:cxn>
+              <a:cxn ang="0">
+                <a:pos x="connsiteX17" y="connsiteY17"/>
+              </a:cxn>
+              <a:cxn ang="0">
+                <a:pos x="connsiteX18" y="connsiteY18"/>
+              </a:cxn>
+              <a:cxn ang="0">
+                <a:pos x="connsiteX19" y="connsiteY19"/>
+              </a:cxn>
+              <a:cxn ang="0">
+                <a:pos x="connsiteX20" y="connsiteY20"/>
+              </a:cxn>
+              <a:cxn ang="0">
+                <a:pos x="connsiteX21" y="connsiteY21"/>
+              </a:cxn>
+              <a:cxn ang="0">
+                <a:pos x="connsiteX22" y="connsiteY22"/>
+              </a:cxn>
+              <a:cxn ang="0">
+                <a:pos x="connsiteX23" y="connsiteY23"/>
+              </a:cxn>
+              <a:cxn ang="0">
+                <a:pos x="connsiteX24" y="connsiteY24"/>
+              </a:cxn>
+              <a:cxn ang="0">
+                <a:pos x="connsiteX25" y="connsiteY25"/>
+              </a:cxn>
+              <a:cxn ang="0">
+                <a:pos x="connsiteX26" y="connsiteY26"/>
+              </a:cxn>
+              <a:cxn ang="0">
+                <a:pos x="connsiteX27" y="connsiteY27"/>
+              </a:cxn>
+              <a:cxn ang="0">
+                <a:pos x="connsiteX28" y="connsiteY28"/>
+              </a:cxn>
+              <a:cxn ang="0">
+                <a:pos x="connsiteX29" y="connsiteY29"/>
+              </a:cxn>
+              <a:cxn ang="0">
+                <a:pos x="connsiteX30" y="connsiteY30"/>
+              </a:cxn>
+              <a:cxn ang="0">
+                <a:pos x="connsiteX31" y="connsiteY31"/>
+              </a:cxn>
+              <a:cxn ang="0">
+                <a:pos x="connsiteX32" y="connsiteY32"/>
+              </a:cxn>
+              <a:cxn ang="0">
+                <a:pos x="connsiteX33" y="connsiteY33"/>
+              </a:cxn>
+              <a:cxn ang="0">
+                <a:pos x="connsiteX34" y="connsiteY34"/>
+              </a:cxn>
+            </a:cxnLst>
+            <a:rect l="l" t="t" r="r" b="b"/>
+            <a:pathLst>
+              <a:path w="10423900" h="5491534">
+                <a:moveTo>
+                  <a:pt x="10423900" y="0"/>
+                </a:moveTo>
+                <a:lnTo>
+                  <a:pt x="3493157" y="0"/>
+                </a:lnTo>
+                <a:lnTo>
+                  <a:pt x="3493018" y="31"/>
+                </a:lnTo>
+                <a:cubicBezTo>
+                  <a:pt x="3414969" y="12668"/>
+                  <a:pt x="3328744" y="21588"/>
+                  <a:pt x="3245493" y="104839"/>
+                </a:cubicBezTo>
+                <a:cubicBezTo>
+                  <a:pt x="3668357" y="162984"/>
+                  <a:pt x="4075366" y="51981"/>
+                  <a:pt x="4434802" y="284558"/>
+                </a:cubicBezTo>
+                <a:cubicBezTo>
+                  <a:pt x="4302656" y="400846"/>
+                  <a:pt x="4154654" y="374416"/>
+                  <a:pt x="4011937" y="395559"/>
+                </a:cubicBezTo>
+                <a:cubicBezTo>
+                  <a:pt x="3863934" y="416704"/>
+                  <a:pt x="3721217" y="453704"/>
+                  <a:pt x="3573213" y="474847"/>
+                </a:cubicBezTo>
+                <a:cubicBezTo>
+                  <a:pt x="3414639" y="501275"/>
+                  <a:pt x="3256063" y="506562"/>
+                  <a:pt x="3097489" y="532990"/>
+                </a:cubicBezTo>
+                <a:cubicBezTo>
+                  <a:pt x="2965345" y="554135"/>
+                  <a:pt x="2822627" y="517133"/>
+                  <a:pt x="2664052" y="649279"/>
+                </a:cubicBezTo>
+                <a:cubicBezTo>
+                  <a:pt x="3055203" y="744424"/>
+                  <a:pt x="3409352" y="601706"/>
+                  <a:pt x="3795218" y="696852"/>
+                </a:cubicBezTo>
+                <a:cubicBezTo>
+                  <a:pt x="3567928" y="781425"/>
+                  <a:pt x="3382924" y="754995"/>
+                  <a:pt x="3208492" y="802568"/>
+                </a:cubicBezTo>
+                <a:cubicBezTo>
+                  <a:pt x="3049916" y="850140"/>
+                  <a:pt x="2859627" y="797282"/>
+                  <a:pt x="2727483" y="939999"/>
+                </a:cubicBezTo>
+                <a:cubicBezTo>
+                  <a:pt x="2627052" y="1051000"/>
+                  <a:pt x="2521336" y="1066858"/>
+                  <a:pt x="2389190" y="1003429"/>
+                </a:cubicBezTo>
+                <a:cubicBezTo>
+                  <a:pt x="2272901" y="945284"/>
+                  <a:pt x="2146043" y="961142"/>
+                  <a:pt x="2029754" y="1019287"/>
+                </a:cubicBezTo>
+                <a:cubicBezTo>
+                  <a:pt x="1987468" y="1040430"/>
+                  <a:pt x="1945181" y="1066858"/>
+                  <a:pt x="1945181" y="1119716"/>
+                </a:cubicBezTo>
+                <a:cubicBezTo>
+                  <a:pt x="1945181" y="1193719"/>
+                  <a:pt x="1998039" y="1214862"/>
+                  <a:pt x="2056184" y="1225434"/>
+                </a:cubicBezTo>
+                <a:cubicBezTo>
+                  <a:pt x="2109042" y="1236004"/>
+                  <a:pt x="2172471" y="1246577"/>
+                  <a:pt x="2225329" y="1236004"/>
+                </a:cubicBezTo>
+                <a:cubicBezTo>
+                  <a:pt x="2563622" y="1177861"/>
+                  <a:pt x="2896629" y="1273005"/>
+                  <a:pt x="3234920" y="1262435"/>
+                </a:cubicBezTo>
+                <a:cubicBezTo>
+                  <a:pt x="2172471" y="1489724"/>
+                  <a:pt x="1099450" y="1415723"/>
+                  <a:pt x="0" y="1495009"/>
+                </a:cubicBezTo>
+                <a:cubicBezTo>
+                  <a:pt x="142717" y="1653583"/>
+                  <a:pt x="327721" y="1521439"/>
+                  <a:pt x="438724" y="1637728"/>
+                </a:cubicBezTo>
+                <a:cubicBezTo>
+                  <a:pt x="333006" y="1880875"/>
+                  <a:pt x="375293" y="2013020"/>
+                  <a:pt x="586726" y="2028877"/>
+                </a:cubicBezTo>
+                <a:cubicBezTo>
+                  <a:pt x="792873" y="2044734"/>
+                  <a:pt x="1014877" y="1960161"/>
+                  <a:pt x="1125878" y="2250882"/>
+                </a:cubicBezTo>
+                <a:cubicBezTo>
+                  <a:pt x="1157593" y="2340740"/>
+                  <a:pt x="1353170" y="2314312"/>
+                  <a:pt x="1474744" y="2330169"/>
+                </a:cubicBezTo>
+                <a:cubicBezTo>
+                  <a:pt x="1739034" y="2367170"/>
+                  <a:pt x="2019183" y="2330169"/>
+                  <a:pt x="2272901" y="2446458"/>
+                </a:cubicBezTo>
+                <a:cubicBezTo>
+                  <a:pt x="2373332" y="2488744"/>
+                  <a:pt x="2442048" y="2520459"/>
+                  <a:pt x="2389190" y="2636747"/>
+                </a:cubicBezTo>
+                <a:cubicBezTo>
+                  <a:pt x="2336332" y="2758321"/>
+                  <a:pt x="2405048" y="2800607"/>
+                  <a:pt x="2489621" y="2848179"/>
+                </a:cubicBezTo>
+                <a:cubicBezTo>
+                  <a:pt x="2553051" y="2885180"/>
+                  <a:pt x="2648195" y="2874609"/>
+                  <a:pt x="2701053" y="2985611"/>
+                </a:cubicBezTo>
+                <a:cubicBezTo>
+                  <a:pt x="2146043" y="2969753"/>
+                  <a:pt x="1606888" y="2879895"/>
+                  <a:pt x="1057165" y="2964468"/>
+                </a:cubicBezTo>
+                <a:cubicBezTo>
+                  <a:pt x="1659748" y="3175900"/>
+                  <a:pt x="2320474" y="3165328"/>
+                  <a:pt x="2912485" y="3408477"/>
+                </a:cubicBezTo>
+                <a:cubicBezTo>
+                  <a:pt x="2891342" y="3493050"/>
+                  <a:pt x="2753911" y="3456048"/>
+                  <a:pt x="2748626" y="3582909"/>
+                </a:cubicBezTo>
+                <a:cubicBezTo>
+                  <a:pt x="3060489" y="3715055"/>
+                  <a:pt x="3435782" y="3625195"/>
+                  <a:pt x="3763503" y="3820771"/>
+                </a:cubicBezTo>
+                <a:cubicBezTo>
+                  <a:pt x="3573213" y="3910629"/>
+                  <a:pt x="3398782" y="3762626"/>
+                  <a:pt x="3219063" y="3847199"/>
+                </a:cubicBezTo>
+                <a:cubicBezTo>
+                  <a:pt x="3277208" y="3974060"/>
+                  <a:pt x="5909545" y="4756360"/>
+                  <a:pt x="6385269" y="4840933"/>
+                </a:cubicBezTo>
+                <a:cubicBezTo>
+                  <a:pt x="7171204" y="4982659"/>
+                  <a:pt x="9157515" y="5302348"/>
+                  <a:pt x="10285854" y="5471118"/>
+                </a:cubicBezTo>
+                <a:lnTo>
+                  <a:pt x="10423900" y="5491534"/>
+                </a:lnTo>
+                <a:close/>
+              </a:path>
+            </a:pathLst>
+          </a:custGeom>
+          <a:solidFill>
+            <a:schemeClr val="bg2">
+              <a:alpha val="50000"/>
+            </a:schemeClr>
+          </a:solidFill>
+          <a:ln w="32707" cap="flat">
+            <a:noFill/>
+            <a:prstDash val="solid"/>
+            <a:miter/>
+          </a:ln>
+        </p:spPr>
+        <p:txBody>
+          <a:bodyPr rtlCol="0" anchor="ctr"/>
+          <a:lstStyle/>
+          <a:p>
+            <a:pPr defTabSz="457200"/>
+            <a:endParaRPr lang="en-US"/>
+          </a:p>
+        </p:txBody>
+      </p:sp>
       <p:sp>
         <p:nvSpPr>
           <p:cNvPr id="2" name="Title 1">
@@ -3688,9 +4160,16 @@
             <p:ph type="title"/>
           </p:nvPr>
         </p:nvSpPr>
-        <p:spPr/>
-        <p:txBody>
-          <a:bodyPr/>
+        <p:spPr>
+          <a:xfrm>
+            <a:off x="5526156" y="365125"/>
+            <a:ext cx="5827643" cy="1433433"/>
+          </a:xfrm>
+        </p:spPr>
+        <p:txBody>
+          <a:bodyPr anchor="b">
+            <a:normAutofit/>
+          </a:bodyPr>
           <a:lstStyle/>
           <a:p>
             <a:r>
@@ -3700,71 +4179,12 @@
           </a:p>
         </p:txBody>
       </p:sp>
-      <p:sp>
-        <p:nvSpPr>
-          <p:cNvPr id="3" name="Content Placeholder 2">
-            <a:extLst>
-              <a:ext uri="{FF2B5EF4-FFF2-40B4-BE49-F238E27FC236}">
-                <a16:creationId xmlns:a16="http://schemas.microsoft.com/office/drawing/2014/main" id="{588AC1A7-E1BB-53E2-6DF6-ED72C07358F7}"/>
-              </a:ext>
-            </a:extLst>
-          </p:cNvPr>
-          <p:cNvSpPr>
-            <a:spLocks noGrp="1"/>
-          </p:cNvSpPr>
-          <p:nvPr>
-            <p:ph idx="1"/>
-          </p:nvPr>
-        </p:nvSpPr>
-        <p:spPr>
-          <a:xfrm>
-            <a:off x="838200" y="3173381"/>
-            <a:ext cx="10086975" cy="3003581"/>
-          </a:xfrm>
-        </p:spPr>
-        <p:txBody>
-          <a:bodyPr>
-            <a:normAutofit lnSpcReduction="10000"/>
-          </a:bodyPr>
-          <a:lstStyle/>
-          <a:p>
-            <a:r>
-              <a:rPr lang="en-GB" dirty="0"/>
-              <a:t>Game involves building your own farm.</a:t>
-            </a:r>
-          </a:p>
-          <a:p>
-            <a:r>
-              <a:rPr lang="en-GB" dirty="0"/>
-              <a:t>Farm will include animal pens and crops which can be harvested after a certain amount of time.</a:t>
-            </a:r>
-          </a:p>
-          <a:p>
-            <a:r>
-              <a:rPr lang="en-GB" dirty="0"/>
-              <a:t>Farmers will act as helpers to help maintain the farm such as cleaning and gathering.</a:t>
-            </a:r>
-          </a:p>
-          <a:p>
-            <a:r>
-              <a:rPr lang="en-GB" dirty="0"/>
-              <a:t>Buying and selling systems in place to provide currency.</a:t>
-            </a:r>
-          </a:p>
-          <a:p>
-            <a:r>
-              <a:rPr lang="en-GB" dirty="0"/>
-              <a:t>Currency used to purchase more on the farm.</a:t>
-            </a:r>
-          </a:p>
-        </p:txBody>
-      </p:sp>
       <p:pic>
         <p:nvPicPr>
-          <p:cNvPr id="5" name="Picture 4">
-            <a:extLst>
-              <a:ext uri="{FF2B5EF4-FFF2-40B4-BE49-F238E27FC236}">
-                <a16:creationId xmlns:a16="http://schemas.microsoft.com/office/drawing/2014/main" id="{89FA9B2E-A750-CF43-78EC-196ABFFF18A5}"/>
+          <p:cNvPr id="6" name="Picture 5">
+            <a:extLst>
+              <a:ext uri="{FF2B5EF4-FFF2-40B4-BE49-F238E27FC236}">
+                <a16:creationId xmlns:a16="http://schemas.microsoft.com/office/drawing/2014/main" id="{14E8BD57-FD06-2880-6469-471CF01CE34A}"/>
               </a:ext>
             </a:extLst>
           </p:cNvPr>
@@ -3774,21 +4194,152 @@
           <p:nvPr/>
         </p:nvPicPr>
         <p:blipFill>
-          <a:blip r:embed="rId2"/>
+          <a:blip r:embed="rId2">
+            <a:extLst>
+              <a:ext uri="{28A0092B-C50C-407E-A947-70E740481C1C}">
+                <a14:useLocalDpi xmlns:a14="http://schemas.microsoft.com/office/drawing/2010/main" val="0"/>
+              </a:ext>
+            </a:extLst>
+          </a:blip>
           <a:stretch>
             <a:fillRect/>
           </a:stretch>
         </p:blipFill>
         <p:spPr>
           <a:xfrm>
-            <a:off x="5423703" y="71068"/>
-            <a:ext cx="6577798" cy="3102314"/>
+            <a:off x="713849" y="711647"/>
+            <a:ext cx="3940444" cy="1615582"/>
           </a:xfrm>
           <a:prstGeom prst="rect">
             <a:avLst/>
           </a:prstGeom>
         </p:spPr>
       </p:pic>
+      <p:pic>
+        <p:nvPicPr>
+          <p:cNvPr id="8" name="Picture 7">
+            <a:extLst>
+              <a:ext uri="{FF2B5EF4-FFF2-40B4-BE49-F238E27FC236}">
+                <a16:creationId xmlns:a16="http://schemas.microsoft.com/office/drawing/2014/main" id="{E0BBB9DB-898F-28CB-ED7D-D3CB43F1CBF4}"/>
+              </a:ext>
+            </a:extLst>
+          </p:cNvPr>
+          <p:cNvPicPr>
+            <a:picLocks noChangeAspect="1"/>
+          </p:cNvPicPr>
+          <p:nvPr/>
+        </p:nvPicPr>
+        <p:blipFill>
+          <a:blip r:embed="rId3">
+            <a:extLst>
+              <a:ext uri="{28A0092B-C50C-407E-A947-70E740481C1C}">
+                <a14:useLocalDpi xmlns:a14="http://schemas.microsoft.com/office/drawing/2010/main" val="0"/>
+              </a:ext>
+            </a:extLst>
+          </a:blip>
+          <a:stretch>
+            <a:fillRect/>
+          </a:stretch>
+        </p:blipFill>
+        <p:spPr>
+          <a:xfrm>
+            <a:off x="713847" y="2624458"/>
+            <a:ext cx="3940445" cy="1615582"/>
+          </a:xfrm>
+          <a:prstGeom prst="rect">
+            <a:avLst/>
+          </a:prstGeom>
+        </p:spPr>
+      </p:pic>
+      <p:pic>
+        <p:nvPicPr>
+          <p:cNvPr id="5" name="Picture 4">
+            <a:extLst>
+              <a:ext uri="{FF2B5EF4-FFF2-40B4-BE49-F238E27FC236}">
+                <a16:creationId xmlns:a16="http://schemas.microsoft.com/office/drawing/2014/main" id="{89FA9B2E-A750-CF43-78EC-196ABFFF18A5}"/>
+              </a:ext>
+            </a:extLst>
+          </p:cNvPr>
+          <p:cNvPicPr>
+            <a:picLocks noChangeAspect="1"/>
+          </p:cNvPicPr>
+          <p:nvPr/>
+        </p:nvPicPr>
+        <p:blipFill>
+          <a:blip r:embed="rId4"/>
+          <a:stretch>
+            <a:fillRect/>
+          </a:stretch>
+        </p:blipFill>
+        <p:spPr>
+          <a:xfrm>
+            <a:off x="810005" y="4443540"/>
+            <a:ext cx="3748131" cy="1770992"/>
+          </a:xfrm>
+          <a:prstGeom prst="rect">
+            <a:avLst/>
+          </a:prstGeom>
+        </p:spPr>
+      </p:pic>
+      <p:sp>
+        <p:nvSpPr>
+          <p:cNvPr id="3" name="Content Placeholder 2">
+            <a:extLst>
+              <a:ext uri="{FF2B5EF4-FFF2-40B4-BE49-F238E27FC236}">
+                <a16:creationId xmlns:a16="http://schemas.microsoft.com/office/drawing/2014/main" id="{588AC1A7-E1BB-53E2-6DF6-ED72C07358F7}"/>
+              </a:ext>
+            </a:extLst>
+          </p:cNvPr>
+          <p:cNvSpPr>
+            <a:spLocks noGrp="1"/>
+          </p:cNvSpPr>
+          <p:nvPr>
+            <p:ph idx="1"/>
+          </p:nvPr>
+        </p:nvSpPr>
+        <p:spPr>
+          <a:xfrm>
+            <a:off x="5526156" y="2055813"/>
+            <a:ext cx="5827644" cy="4121149"/>
+          </a:xfrm>
+        </p:spPr>
+        <p:txBody>
+          <a:bodyPr anchor="t">
+            <a:normAutofit/>
+          </a:bodyPr>
+          <a:lstStyle/>
+          <a:p>
+            <a:r>
+              <a:rPr lang="en-GB" sz="2000"/>
+              <a:t>Game involves building your own farm.</a:t>
+            </a:r>
+          </a:p>
+          <a:p>
+            <a:r>
+              <a:rPr lang="en-GB" sz="2000"/>
+              <a:t>Farm will include animal pens and crops which can be harvested after a certain amount of time.</a:t>
+            </a:r>
+          </a:p>
+          <a:p>
+            <a:r>
+              <a:rPr lang="en-GB" sz="2000"/>
+              <a:t>Farmers will act as helpers to help maintain the farm such as cleaning and gathering.</a:t>
+            </a:r>
+          </a:p>
+          <a:p>
+            <a:r>
+              <a:rPr lang="en-GB" sz="2000"/>
+              <a:t>Buying and selling systems in place to provide currency.</a:t>
+            </a:r>
+          </a:p>
+          <a:p>
+            <a:r>
+              <a:rPr lang="en-GB" sz="2000"/>
+              <a:t>Currency used to purchase more on the farm.</a:t>
+            </a:r>
+          </a:p>
+        </p:txBody>
+      </p:sp>
     </p:spTree>
     <p:extLst>
       <p:ext uri="{BB962C8B-B14F-4D97-AF65-F5344CB8AC3E}">
@@ -3805,6 +4356,14 @@
 <file path=ppt/slides/slide5.xml><?xml version="1.0" encoding="utf-8"?>
 <p:sld xmlns:a="http://schemas.openxmlformats.org/drawingml/2006/main" xmlns:r="http://schemas.openxmlformats.org/officeDocument/2006/relationships" xmlns:p="http://schemas.openxmlformats.org/presentationml/2006/main">
   <p:cSld>
+    <p:bg>
+      <p:bgPr>
+        <a:solidFill>
+          <a:schemeClr val="bg1"/>
+        </a:solidFill>
+        <a:effectLst/>
+      </p:bgPr>
+    </p:bg>
     <p:spTree>
       <p:nvGrpSpPr>
         <p:cNvPr id="1" name=""/>
@@ -3819,6 +4378,66 @@
           <a:chExt cx="0" cy="0"/>
         </a:xfrm>
       </p:grpSpPr>
+      <p:sp useBgFill="1">
+        <p:nvSpPr>
+          <p:cNvPr id="12" name="Rectangle 11">
+            <a:extLst>
+              <a:ext uri="{FF2B5EF4-FFF2-40B4-BE49-F238E27FC236}">
+                <a16:creationId xmlns:a16="http://schemas.microsoft.com/office/drawing/2014/main" id="{53E60C6D-4E85-4E14-BCDF-BF15C241F7CA}"/>
+              </a:ext>
+              <a:ext uri="{C183D7F6-B498-43B3-948B-1728B52AA6E4}">
+                <adec:decorative xmlns:adec="http://schemas.microsoft.com/office/drawing/2017/decorative" val="1"/>
+              </a:ext>
+            </a:extLst>
+          </p:cNvPr>
+          <p:cNvSpPr>
+            <a:spLocks noGrp="1" noRot="1" noChangeAspect="1" noMove="1" noResize="1" noEditPoints="1" noAdjustHandles="1" noChangeArrowheads="1" noChangeShapeType="1" noTextEdit="1"/>
+          </p:cNvSpPr>
+          <p:nvPr>
+            <p:extLst>
+              <p:ext uri="{386F3935-93C4-4BCD-93E2-E3B085C9AB24}">
+                <p16:designElem xmlns:p16="http://schemas.microsoft.com/office/powerpoint/2015/main" val="1"/>
+              </p:ext>
+            </p:extLst>
+          </p:nvPr>
+        </p:nvSpPr>
+        <p:spPr>
+          <a:xfrm>
+            <a:off x="0" y="0"/>
+            <a:ext cx="12188952" cy="6858000"/>
+          </a:xfrm>
+          <a:prstGeom prst="rect">
+            <a:avLst/>
+          </a:prstGeom>
+          <a:ln>
+            <a:noFill/>
+          </a:ln>
+        </p:spPr>
+        <p:style>
+          <a:lnRef idx="2">
+            <a:schemeClr val="accent1">
+              <a:shade val="50000"/>
+            </a:schemeClr>
+          </a:lnRef>
+          <a:fillRef idx="1">
+            <a:schemeClr val="accent1"/>
+          </a:fillRef>
+          <a:effectRef idx="0">
+            <a:schemeClr val="accent1"/>
+          </a:effectRef>
+          <a:fontRef idx="minor">
+            <a:schemeClr val="lt1"/>
+          </a:fontRef>
+        </p:style>
+        <p:txBody>
+          <a:bodyPr rtlCol="0" anchor="ctr"/>
+          <a:lstStyle/>
+          <a:p>
+            <a:pPr algn="ctr"/>
+            <a:endParaRPr lang="en-US"/>
+          </a:p>
+        </p:txBody>
+      </p:sp>
       <p:sp>
         <p:nvSpPr>
           <p:cNvPr id="2" name="Title 1">
@@ -3835,9 +4454,16 @@
             <p:ph type="title"/>
           </p:nvPr>
         </p:nvSpPr>
-        <p:spPr/>
-        <p:txBody>
-          <a:bodyPr/>
+        <p:spPr>
+          <a:xfrm>
+            <a:off x="6151294" y="486184"/>
+            <a:ext cx="5397237" cy="1325563"/>
+          </a:xfrm>
+        </p:spPr>
+        <p:txBody>
+          <a:bodyPr>
+            <a:normAutofit/>
+          </a:bodyPr>
           <a:lstStyle/>
           <a:p>
             <a:r>
@@ -3847,6 +4473,302 @@
           </a:p>
         </p:txBody>
       </p:sp>
+      <p:pic>
+        <p:nvPicPr>
+          <p:cNvPr id="7" name="Picture 6">
+            <a:extLst>
+              <a:ext uri="{FF2B5EF4-FFF2-40B4-BE49-F238E27FC236}">
+                <a16:creationId xmlns:a16="http://schemas.microsoft.com/office/drawing/2014/main" id="{F98A55FE-73AA-DE96-DC9A-0CDC7051FAD6}"/>
+              </a:ext>
+            </a:extLst>
+          </p:cNvPr>
+          <p:cNvPicPr>
+            <a:picLocks noChangeAspect="1"/>
+          </p:cNvPicPr>
+          <p:nvPr/>
+        </p:nvPicPr>
+        <p:blipFill>
+          <a:blip r:embed="rId2">
+            <a:extLst>
+              <a:ext uri="{28A0092B-C50C-407E-A947-70E740481C1C}">
+                <a14:useLocalDpi xmlns:a14="http://schemas.microsoft.com/office/drawing/2010/main" val="0"/>
+              </a:ext>
+            </a:extLst>
+          </a:blip>
+          <a:stretch>
+            <a:fillRect/>
+          </a:stretch>
+        </p:blipFill>
+        <p:spPr>
+          <a:xfrm>
+            <a:off x="698353" y="1031405"/>
+            <a:ext cx="4555700" cy="1867837"/>
+          </a:xfrm>
+          <a:custGeom>
+            <a:avLst/>
+            <a:gdLst/>
+            <a:ahLst/>
+            <a:cxnLst/>
+            <a:rect l="l" t="t" r="r" b="b"/>
+            <a:pathLst>
+              <a:path w="4555700" h="2733294">
+                <a:moveTo>
+                  <a:pt x="82217" y="0"/>
+                </a:moveTo>
+                <a:lnTo>
+                  <a:pt x="4473483" y="0"/>
+                </a:lnTo>
+                <a:cubicBezTo>
+                  <a:pt x="4518890" y="0"/>
+                  <a:pt x="4555700" y="36810"/>
+                  <a:pt x="4555700" y="82217"/>
+                </a:cubicBezTo>
+                <a:lnTo>
+                  <a:pt x="4555700" y="2651077"/>
+                </a:lnTo>
+                <a:cubicBezTo>
+                  <a:pt x="4555700" y="2696484"/>
+                  <a:pt x="4518890" y="2733294"/>
+                  <a:pt x="4473483" y="2733294"/>
+                </a:cubicBezTo>
+                <a:lnTo>
+                  <a:pt x="82217" y="2733294"/>
+                </a:lnTo>
+                <a:cubicBezTo>
+                  <a:pt x="36810" y="2733294"/>
+                  <a:pt x="0" y="2696484"/>
+                  <a:pt x="0" y="2651077"/>
+                </a:cubicBezTo>
+                <a:lnTo>
+                  <a:pt x="0" y="82217"/>
+                </a:lnTo>
+                <a:cubicBezTo>
+                  <a:pt x="0" y="36810"/>
+                  <a:pt x="36810" y="0"/>
+                  <a:pt x="82217" y="0"/>
+                </a:cubicBezTo>
+                <a:close/>
+              </a:path>
+            </a:pathLst>
+          </a:custGeom>
+        </p:spPr>
+      </p:pic>
+      <p:sp>
+        <p:nvSpPr>
+          <p:cNvPr id="14" name="Freeform: Shape 13">
+            <a:extLst>
+              <a:ext uri="{FF2B5EF4-FFF2-40B4-BE49-F238E27FC236}">
+                <a16:creationId xmlns:a16="http://schemas.microsoft.com/office/drawing/2014/main" id="{7D42D292-4C48-479B-9E59-E29CD9871C0C}"/>
+              </a:ext>
+              <a:ext uri="{C183D7F6-B498-43B3-948B-1728B52AA6E4}">
+                <adec:decorative xmlns:adec="http://schemas.microsoft.com/office/drawing/2017/decorative" val="1"/>
+              </a:ext>
+            </a:extLst>
+          </p:cNvPr>
+          <p:cNvSpPr>
+            <a:spLocks noGrp="1" noRot="1" noChangeAspect="1" noMove="1" noResize="1" noEditPoints="1" noAdjustHandles="1" noChangeArrowheads="1" noChangeShapeType="1" noTextEdit="1"/>
+          </p:cNvSpPr>
+          <p:nvPr>
+            <p:extLst>
+              <p:ext uri="{386F3935-93C4-4BCD-93E2-E3B085C9AB24}">
+                <p16:designElem xmlns:p16="http://schemas.microsoft.com/office/powerpoint/2015/main" val="1"/>
+              </p:ext>
+            </p:extLst>
+          </p:nvPr>
+        </p:nvSpPr>
+        <p:spPr>
+          <a:xfrm flipH="1">
+            <a:off x="0" y="5486400"/>
+            <a:ext cx="2672863" cy="1371600"/>
+          </a:xfrm>
+          <a:custGeom>
+            <a:avLst/>
+            <a:gdLst>
+              <a:gd name="connsiteX0" fmla="*/ 1721734 w 2672863"/>
+              <a:gd name="connsiteY0" fmla="*/ 0 h 1371600"/>
+              <a:gd name="connsiteX1" fmla="*/ 2564444 w 2672863"/>
+              <a:gd name="connsiteY1" fmla="*/ 213382 h 1371600"/>
+              <a:gd name="connsiteX2" fmla="*/ 2672863 w 2672863"/>
+              <a:gd name="connsiteY2" fmla="*/ 279248 h 1371600"/>
+              <a:gd name="connsiteX3" fmla="*/ 2672863 w 2672863"/>
+              <a:gd name="connsiteY3" fmla="*/ 1371600 h 1371600"/>
+              <a:gd name="connsiteX4" fmla="*/ 0 w 2672863"/>
+              <a:gd name="connsiteY4" fmla="*/ 1371600 h 1371600"/>
+              <a:gd name="connsiteX5" fmla="*/ 33268 w 2672863"/>
+              <a:gd name="connsiteY5" fmla="*/ 1242216 h 1371600"/>
+              <a:gd name="connsiteX6" fmla="*/ 1721734 w 2672863"/>
+              <a:gd name="connsiteY6" fmla="*/ 0 h 1371600"/>
+            </a:gdLst>
+            <a:ahLst/>
+            <a:cxnLst>
+              <a:cxn ang="0">
+                <a:pos x="connsiteX0" y="connsiteY0"/>
+              </a:cxn>
+              <a:cxn ang="0">
+                <a:pos x="connsiteX1" y="connsiteY1"/>
+              </a:cxn>
+              <a:cxn ang="0">
+                <a:pos x="connsiteX2" y="connsiteY2"/>
+              </a:cxn>
+              <a:cxn ang="0">
+                <a:pos x="connsiteX3" y="connsiteY3"/>
+              </a:cxn>
+              <a:cxn ang="0">
+                <a:pos x="connsiteX4" y="connsiteY4"/>
+              </a:cxn>
+              <a:cxn ang="0">
+                <a:pos x="connsiteX5" y="connsiteY5"/>
+              </a:cxn>
+              <a:cxn ang="0">
+                <a:pos x="connsiteX6" y="connsiteY6"/>
+              </a:cxn>
+            </a:cxnLst>
+            <a:rect l="l" t="t" r="r" b="b"/>
+            <a:pathLst>
+              <a:path w="2672863" h="1371600">
+                <a:moveTo>
+                  <a:pt x="1721734" y="0"/>
+                </a:moveTo>
+                <a:cubicBezTo>
+                  <a:pt x="2026863" y="0"/>
+                  <a:pt x="2313937" y="77299"/>
+                  <a:pt x="2564444" y="213382"/>
+                </a:cubicBezTo>
+                <a:lnTo>
+                  <a:pt x="2672863" y="279248"/>
+                </a:lnTo>
+                <a:lnTo>
+                  <a:pt x="2672863" y="1371600"/>
+                </a:lnTo>
+                <a:lnTo>
+                  <a:pt x="0" y="1371600"/>
+                </a:lnTo>
+                <a:lnTo>
+                  <a:pt x="33268" y="1242216"/>
+                </a:lnTo>
+                <a:cubicBezTo>
+                  <a:pt x="257110" y="522539"/>
+                  <a:pt x="928399" y="0"/>
+                  <a:pt x="1721734" y="0"/>
+                </a:cubicBezTo>
+                <a:close/>
+              </a:path>
+            </a:pathLst>
+          </a:custGeom>
+          <a:solidFill>
+            <a:schemeClr val="accent4"/>
+          </a:solidFill>
+          <a:ln>
+            <a:noFill/>
+          </a:ln>
+        </p:spPr>
+        <p:style>
+          <a:lnRef idx="2">
+            <a:schemeClr val="accent1">
+              <a:shade val="50000"/>
+            </a:schemeClr>
+          </a:lnRef>
+          <a:fillRef idx="1">
+            <a:schemeClr val="accent1"/>
+          </a:fillRef>
+          <a:effectRef idx="0">
+            <a:schemeClr val="accent1"/>
+          </a:effectRef>
+          <a:fontRef idx="minor">
+            <a:schemeClr val="lt1"/>
+          </a:fontRef>
+        </p:style>
+        <p:txBody>
+          <a:bodyPr wrap="square" rtlCol="0" anchor="ctr">
+            <a:noAutofit/>
+          </a:bodyPr>
+          <a:lstStyle/>
+          <a:p>
+            <a:pPr algn="ctr"/>
+            <a:endParaRPr lang="en-US"/>
+          </a:p>
+        </p:txBody>
+      </p:sp>
+      <p:pic>
+        <p:nvPicPr>
+          <p:cNvPr id="5" name="Picture 4">
+            <a:extLst>
+              <a:ext uri="{FF2B5EF4-FFF2-40B4-BE49-F238E27FC236}">
+                <a16:creationId xmlns:a16="http://schemas.microsoft.com/office/drawing/2014/main" id="{D44F5312-AA18-76F0-A00A-8F446769608A}"/>
+              </a:ext>
+            </a:extLst>
+          </p:cNvPr>
+          <p:cNvPicPr>
+            <a:picLocks noChangeAspect="1"/>
+          </p:cNvPicPr>
+          <p:nvPr/>
+        </p:nvPicPr>
+        <p:blipFill>
+          <a:blip r:embed="rId3">
+            <a:extLst>
+              <a:ext uri="{28A0092B-C50C-407E-A947-70E740481C1C}">
+                <a14:useLocalDpi xmlns:a14="http://schemas.microsoft.com/office/drawing/2010/main" val="0"/>
+              </a:ext>
+            </a:extLst>
+          </a:blip>
+          <a:stretch>
+            <a:fillRect/>
+          </a:stretch>
+        </p:blipFill>
+        <p:spPr>
+          <a:xfrm>
+            <a:off x="698353" y="3958757"/>
+            <a:ext cx="4555700" cy="1867837"/>
+          </a:xfrm>
+          <a:custGeom>
+            <a:avLst/>
+            <a:gdLst/>
+            <a:ahLst/>
+            <a:cxnLst/>
+            <a:rect l="l" t="t" r="r" b="b"/>
+            <a:pathLst>
+              <a:path w="4438338" h="2323972">
+                <a:moveTo>
+                  <a:pt x="69905" y="0"/>
+                </a:moveTo>
+                <a:lnTo>
+                  <a:pt x="4368433" y="0"/>
+                </a:lnTo>
+                <a:cubicBezTo>
+                  <a:pt x="4407040" y="0"/>
+                  <a:pt x="4438338" y="31298"/>
+                  <a:pt x="4438338" y="69905"/>
+                </a:cubicBezTo>
+                <a:lnTo>
+                  <a:pt x="4438338" y="2254067"/>
+                </a:lnTo>
+                <a:cubicBezTo>
+                  <a:pt x="4438338" y="2292674"/>
+                  <a:pt x="4407040" y="2323972"/>
+                  <a:pt x="4368433" y="2323972"/>
+                </a:cubicBezTo>
+                <a:lnTo>
+                  <a:pt x="69905" y="2323972"/>
+                </a:lnTo>
+                <a:cubicBezTo>
+                  <a:pt x="31298" y="2323972"/>
+                  <a:pt x="0" y="2292674"/>
+                  <a:pt x="0" y="2254067"/>
+                </a:cubicBezTo>
+                <a:lnTo>
+                  <a:pt x="0" y="69905"/>
+                </a:lnTo>
+                <a:cubicBezTo>
+                  <a:pt x="0" y="31298"/>
+                  <a:pt x="31298" y="0"/>
+                  <a:pt x="69905" y="0"/>
+                </a:cubicBezTo>
+                <a:close/>
+              </a:path>
+            </a:pathLst>
+          </a:custGeom>
+        </p:spPr>
+      </p:pic>
       <p:sp>
         <p:nvSpPr>
           <p:cNvPr id="3" name="Content Placeholder 2">
@@ -3863,30 +4785,101 @@
             <p:ph idx="1"/>
           </p:nvPr>
         </p:nvSpPr>
-        <p:spPr/>
-        <p:txBody>
-          <a:bodyPr/>
-          <a:lstStyle/>
-          <a:p>
-            <a:r>
-              <a:rPr lang="en-GB" dirty="0"/>
+        <p:spPr>
+          <a:xfrm>
+            <a:off x="6151294" y="1946684"/>
+            <a:ext cx="5397237" cy="4351338"/>
+          </a:xfrm>
+        </p:spPr>
+        <p:txBody>
+          <a:bodyPr>
+            <a:normAutofit/>
+          </a:bodyPr>
+          <a:lstStyle/>
+          <a:p>
+            <a:r>
+              <a:rPr lang="en-GB" sz="2600"/>
               <a:t>Accelerometer used for the cow minigame whereby you must shake the phone to milk the cow.</a:t>
             </a:r>
           </a:p>
           <a:p>
             <a:r>
-              <a:rPr lang="en-GB" dirty="0"/>
+              <a:rPr lang="en-GB" sz="2600"/>
               <a:t>Gyro is used for the chicken minigame whereby the player tilts the basket to catch the eggs</a:t>
             </a:r>
           </a:p>
           <a:p>
             <a:r>
-              <a:rPr lang="en-GB" dirty="0"/>
+              <a:rPr lang="en-GB" sz="2600"/>
               <a:t>Microphone is used for the sheep minigame whereby the player blows into the mic to strip the wool.</a:t>
             </a:r>
           </a:p>
           <a:p>
-            <a:endParaRPr lang="en-GB" dirty="0"/>
+            <a:endParaRPr lang="en-GB" sz="2600"/>
+          </a:p>
+        </p:txBody>
+      </p:sp>
+      <p:sp>
+        <p:nvSpPr>
+          <p:cNvPr id="16" name="Arc 15">
+            <a:extLst>
+              <a:ext uri="{FF2B5EF4-FFF2-40B4-BE49-F238E27FC236}">
+                <a16:creationId xmlns:a16="http://schemas.microsoft.com/office/drawing/2014/main" id="{533DF362-939D-4EEE-8DC4-6B54607E5611}"/>
+              </a:ext>
+              <a:ext uri="{C183D7F6-B498-43B3-948B-1728B52AA6E4}">
+                <adec:decorative xmlns:adec="http://schemas.microsoft.com/office/drawing/2017/decorative" val="1"/>
+              </a:ext>
+            </a:extLst>
+          </p:cNvPr>
+          <p:cNvSpPr>
+            <a:spLocks noGrp="1" noRot="1" noChangeAspect="1" noMove="1" noResize="1" noEditPoints="1" noAdjustHandles="1" noChangeArrowheads="1" noChangeShapeType="1" noTextEdit="1"/>
+          </p:cNvSpPr>
+          <p:nvPr>
+            <p:extLst>
+              <p:ext uri="{386F3935-93C4-4BCD-93E2-E3B085C9AB24}">
+                <p16:designElem xmlns:p16="http://schemas.microsoft.com/office/powerpoint/2015/main" val="1"/>
+              </p:ext>
+            </p:extLst>
+          </p:nvPr>
+        </p:nvSpPr>
+        <p:spPr>
+          <a:xfrm rot="1095198">
+            <a:off x="1539683" y="162676"/>
+            <a:ext cx="4083433" cy="4083433"/>
+          </a:xfrm>
+          <a:prstGeom prst="arc">
+            <a:avLst>
+              <a:gd name="adj1" fmla="val 17445962"/>
+              <a:gd name="adj2" fmla="val 0"/>
+            </a:avLst>
+          </a:prstGeom>
+          <a:ln w="127000" cap="rnd">
+            <a:solidFill>
+              <a:schemeClr val="accent4"/>
+            </a:solidFill>
+            <a:prstDash val="dash"/>
+          </a:ln>
+        </p:spPr>
+        <p:style>
+          <a:lnRef idx="1">
+            <a:schemeClr val="accent1"/>
+          </a:lnRef>
+          <a:fillRef idx="0">
+            <a:schemeClr val="accent1"/>
+          </a:fillRef>
+          <a:effectRef idx="0">
+            <a:schemeClr val="accent1"/>
+          </a:effectRef>
+          <a:fontRef idx="minor">
+            <a:schemeClr val="tx1"/>
+          </a:fontRef>
+        </p:style>
+        <p:txBody>
+          <a:bodyPr rtlCol="0" anchor="ctr"/>
+          <a:lstStyle/>
+          <a:p>
+            <a:pPr algn="ctr"/>
+            <a:endParaRPr lang="en-US" dirty="0"/>
           </a:p>
         </p:txBody>
       </p:sp>
@@ -3906,6 +4899,14 @@
 <file path=ppt/slides/slide6.xml><?xml version="1.0" encoding="utf-8"?>
 <p:sld xmlns:a="http://schemas.openxmlformats.org/drawingml/2006/main" xmlns:r="http://schemas.openxmlformats.org/officeDocument/2006/relationships" xmlns:p="http://schemas.openxmlformats.org/presentationml/2006/main">
   <p:cSld>
+    <p:bg>
+      <p:bgPr>
+        <a:solidFill>
+          <a:schemeClr val="bg1"/>
+        </a:solidFill>
+        <a:effectLst/>
+      </p:bgPr>
+    </p:bg>
     <p:spTree>
       <p:nvGrpSpPr>
         <p:cNvPr id="1" name=""/>
@@ -3920,6 +4921,66 @@
           <a:chExt cx="0" cy="0"/>
         </a:xfrm>
       </p:grpSpPr>
+      <p:sp useBgFill="1">
+        <p:nvSpPr>
+          <p:cNvPr id="12" name="Rectangle 11">
+            <a:extLst>
+              <a:ext uri="{FF2B5EF4-FFF2-40B4-BE49-F238E27FC236}">
+                <a16:creationId xmlns:a16="http://schemas.microsoft.com/office/drawing/2014/main" id="{53E60C6D-4E85-4E14-BCDF-BF15C241F7CA}"/>
+              </a:ext>
+              <a:ext uri="{C183D7F6-B498-43B3-948B-1728B52AA6E4}">
+                <adec:decorative xmlns:adec="http://schemas.microsoft.com/office/drawing/2017/decorative" val="1"/>
+              </a:ext>
+            </a:extLst>
+          </p:cNvPr>
+          <p:cNvSpPr>
+            <a:spLocks noGrp="1" noRot="1" noChangeAspect="1" noMove="1" noResize="1" noEditPoints="1" noAdjustHandles="1" noChangeArrowheads="1" noChangeShapeType="1" noTextEdit="1"/>
+          </p:cNvSpPr>
+          <p:nvPr>
+            <p:extLst>
+              <p:ext uri="{386F3935-93C4-4BCD-93E2-E3B085C9AB24}">
+                <p16:designElem xmlns:p16="http://schemas.microsoft.com/office/powerpoint/2015/main" val="1"/>
+              </p:ext>
+            </p:extLst>
+          </p:nvPr>
+        </p:nvSpPr>
+        <p:spPr>
+          <a:xfrm>
+            <a:off x="0" y="0"/>
+            <a:ext cx="12188952" cy="6858000"/>
+          </a:xfrm>
+          <a:prstGeom prst="rect">
+            <a:avLst/>
+          </a:prstGeom>
+          <a:ln>
+            <a:noFill/>
+          </a:ln>
+        </p:spPr>
+        <p:style>
+          <a:lnRef idx="2">
+            <a:schemeClr val="accent1">
+              <a:shade val="50000"/>
+            </a:schemeClr>
+          </a:lnRef>
+          <a:fillRef idx="1">
+            <a:schemeClr val="accent1"/>
+          </a:fillRef>
+          <a:effectRef idx="0">
+            <a:schemeClr val="accent1"/>
+          </a:effectRef>
+          <a:fontRef idx="minor">
+            <a:schemeClr val="lt1"/>
+          </a:fontRef>
+        </p:style>
+        <p:txBody>
+          <a:bodyPr rtlCol="0" anchor="ctr"/>
+          <a:lstStyle/>
+          <a:p>
+            <a:pPr algn="ctr"/>
+            <a:endParaRPr lang="en-US"/>
+          </a:p>
+        </p:txBody>
+      </p:sp>
       <p:sp>
         <p:nvSpPr>
           <p:cNvPr id="2" name="Title 1">
@@ -3936,9 +4997,16 @@
             <p:ph type="title"/>
           </p:nvPr>
         </p:nvSpPr>
-        <p:spPr/>
-        <p:txBody>
-          <a:bodyPr/>
+        <p:spPr>
+          <a:xfrm>
+            <a:off x="6151294" y="486184"/>
+            <a:ext cx="5397237" cy="1325563"/>
+          </a:xfrm>
+        </p:spPr>
+        <p:txBody>
+          <a:bodyPr>
+            <a:normAutofit/>
+          </a:bodyPr>
           <a:lstStyle/>
           <a:p>
             <a:r>
@@ -3948,6 +5016,302 @@
           </a:p>
         </p:txBody>
       </p:sp>
+      <p:pic>
+        <p:nvPicPr>
+          <p:cNvPr id="5" name="Picture 4">
+            <a:extLst>
+              <a:ext uri="{FF2B5EF4-FFF2-40B4-BE49-F238E27FC236}">
+                <a16:creationId xmlns:a16="http://schemas.microsoft.com/office/drawing/2014/main" id="{9B5F15F3-AA1D-BE64-56A0-E719F003057C}"/>
+              </a:ext>
+            </a:extLst>
+          </p:cNvPr>
+          <p:cNvPicPr>
+            <a:picLocks noChangeAspect="1"/>
+          </p:cNvPicPr>
+          <p:nvPr/>
+        </p:nvPicPr>
+        <p:blipFill>
+          <a:blip r:embed="rId2">
+            <a:extLst>
+              <a:ext uri="{28A0092B-C50C-407E-A947-70E740481C1C}">
+                <a14:useLocalDpi xmlns:a14="http://schemas.microsoft.com/office/drawing/2010/main" val="0"/>
+              </a:ext>
+            </a:extLst>
+          </a:blip>
+          <a:stretch>
+            <a:fillRect/>
+          </a:stretch>
+        </p:blipFill>
+        <p:spPr>
+          <a:xfrm>
+            <a:off x="698353" y="1031405"/>
+            <a:ext cx="4555700" cy="1867837"/>
+          </a:xfrm>
+          <a:custGeom>
+            <a:avLst/>
+            <a:gdLst/>
+            <a:ahLst/>
+            <a:cxnLst/>
+            <a:rect l="l" t="t" r="r" b="b"/>
+            <a:pathLst>
+              <a:path w="4555700" h="2733294">
+                <a:moveTo>
+                  <a:pt x="82217" y="0"/>
+                </a:moveTo>
+                <a:lnTo>
+                  <a:pt x="4473483" y="0"/>
+                </a:lnTo>
+                <a:cubicBezTo>
+                  <a:pt x="4518890" y="0"/>
+                  <a:pt x="4555700" y="36810"/>
+                  <a:pt x="4555700" y="82217"/>
+                </a:cubicBezTo>
+                <a:lnTo>
+                  <a:pt x="4555700" y="2651077"/>
+                </a:lnTo>
+                <a:cubicBezTo>
+                  <a:pt x="4555700" y="2696484"/>
+                  <a:pt x="4518890" y="2733294"/>
+                  <a:pt x="4473483" y="2733294"/>
+                </a:cubicBezTo>
+                <a:lnTo>
+                  <a:pt x="82217" y="2733294"/>
+                </a:lnTo>
+                <a:cubicBezTo>
+                  <a:pt x="36810" y="2733294"/>
+                  <a:pt x="0" y="2696484"/>
+                  <a:pt x="0" y="2651077"/>
+                </a:cubicBezTo>
+                <a:lnTo>
+                  <a:pt x="0" y="82217"/>
+                </a:lnTo>
+                <a:cubicBezTo>
+                  <a:pt x="0" y="36810"/>
+                  <a:pt x="36810" y="0"/>
+                  <a:pt x="82217" y="0"/>
+                </a:cubicBezTo>
+                <a:close/>
+              </a:path>
+            </a:pathLst>
+          </a:custGeom>
+        </p:spPr>
+      </p:pic>
+      <p:sp>
+        <p:nvSpPr>
+          <p:cNvPr id="14" name="Freeform: Shape 13">
+            <a:extLst>
+              <a:ext uri="{FF2B5EF4-FFF2-40B4-BE49-F238E27FC236}">
+                <a16:creationId xmlns:a16="http://schemas.microsoft.com/office/drawing/2014/main" id="{7D42D292-4C48-479B-9E59-E29CD9871C0C}"/>
+              </a:ext>
+              <a:ext uri="{C183D7F6-B498-43B3-948B-1728B52AA6E4}">
+                <adec:decorative xmlns:adec="http://schemas.microsoft.com/office/drawing/2017/decorative" val="1"/>
+              </a:ext>
+            </a:extLst>
+          </p:cNvPr>
+          <p:cNvSpPr>
+            <a:spLocks noGrp="1" noRot="1" noChangeAspect="1" noMove="1" noResize="1" noEditPoints="1" noAdjustHandles="1" noChangeArrowheads="1" noChangeShapeType="1" noTextEdit="1"/>
+          </p:cNvSpPr>
+          <p:nvPr>
+            <p:extLst>
+              <p:ext uri="{386F3935-93C4-4BCD-93E2-E3B085C9AB24}">
+                <p16:designElem xmlns:p16="http://schemas.microsoft.com/office/powerpoint/2015/main" val="1"/>
+              </p:ext>
+            </p:extLst>
+          </p:nvPr>
+        </p:nvSpPr>
+        <p:spPr>
+          <a:xfrm flipH="1">
+            <a:off x="0" y="5486400"/>
+            <a:ext cx="2672863" cy="1371600"/>
+          </a:xfrm>
+          <a:custGeom>
+            <a:avLst/>
+            <a:gdLst>
+              <a:gd name="connsiteX0" fmla="*/ 1721734 w 2672863"/>
+              <a:gd name="connsiteY0" fmla="*/ 0 h 1371600"/>
+              <a:gd name="connsiteX1" fmla="*/ 2564444 w 2672863"/>
+              <a:gd name="connsiteY1" fmla="*/ 213382 h 1371600"/>
+              <a:gd name="connsiteX2" fmla="*/ 2672863 w 2672863"/>
+              <a:gd name="connsiteY2" fmla="*/ 279248 h 1371600"/>
+              <a:gd name="connsiteX3" fmla="*/ 2672863 w 2672863"/>
+              <a:gd name="connsiteY3" fmla="*/ 1371600 h 1371600"/>
+              <a:gd name="connsiteX4" fmla="*/ 0 w 2672863"/>
+              <a:gd name="connsiteY4" fmla="*/ 1371600 h 1371600"/>
+              <a:gd name="connsiteX5" fmla="*/ 33268 w 2672863"/>
+              <a:gd name="connsiteY5" fmla="*/ 1242216 h 1371600"/>
+              <a:gd name="connsiteX6" fmla="*/ 1721734 w 2672863"/>
+              <a:gd name="connsiteY6" fmla="*/ 0 h 1371600"/>
+            </a:gdLst>
+            <a:ahLst/>
+            <a:cxnLst>
+              <a:cxn ang="0">
+                <a:pos x="connsiteX0" y="connsiteY0"/>
+              </a:cxn>
+              <a:cxn ang="0">
+                <a:pos x="connsiteX1" y="connsiteY1"/>
+              </a:cxn>
+              <a:cxn ang="0">
+                <a:pos x="connsiteX2" y="connsiteY2"/>
+              </a:cxn>
+              <a:cxn ang="0">
+                <a:pos x="connsiteX3" y="connsiteY3"/>
+              </a:cxn>
+              <a:cxn ang="0">
+                <a:pos x="connsiteX4" y="connsiteY4"/>
+              </a:cxn>
+              <a:cxn ang="0">
+                <a:pos x="connsiteX5" y="connsiteY5"/>
+              </a:cxn>
+              <a:cxn ang="0">
+                <a:pos x="connsiteX6" y="connsiteY6"/>
+              </a:cxn>
+            </a:cxnLst>
+            <a:rect l="l" t="t" r="r" b="b"/>
+            <a:pathLst>
+              <a:path w="2672863" h="1371600">
+                <a:moveTo>
+                  <a:pt x="1721734" y="0"/>
+                </a:moveTo>
+                <a:cubicBezTo>
+                  <a:pt x="2026863" y="0"/>
+                  <a:pt x="2313937" y="77299"/>
+                  <a:pt x="2564444" y="213382"/>
+                </a:cubicBezTo>
+                <a:lnTo>
+                  <a:pt x="2672863" y="279248"/>
+                </a:lnTo>
+                <a:lnTo>
+                  <a:pt x="2672863" y="1371600"/>
+                </a:lnTo>
+                <a:lnTo>
+                  <a:pt x="0" y="1371600"/>
+                </a:lnTo>
+                <a:lnTo>
+                  <a:pt x="33268" y="1242216"/>
+                </a:lnTo>
+                <a:cubicBezTo>
+                  <a:pt x="257110" y="522539"/>
+                  <a:pt x="928399" y="0"/>
+                  <a:pt x="1721734" y="0"/>
+                </a:cubicBezTo>
+                <a:close/>
+              </a:path>
+            </a:pathLst>
+          </a:custGeom>
+          <a:solidFill>
+            <a:schemeClr val="accent4"/>
+          </a:solidFill>
+          <a:ln>
+            <a:noFill/>
+          </a:ln>
+        </p:spPr>
+        <p:style>
+          <a:lnRef idx="2">
+            <a:schemeClr val="accent1">
+              <a:shade val="50000"/>
+            </a:schemeClr>
+          </a:lnRef>
+          <a:fillRef idx="1">
+            <a:schemeClr val="accent1"/>
+          </a:fillRef>
+          <a:effectRef idx="0">
+            <a:schemeClr val="accent1"/>
+          </a:effectRef>
+          <a:fontRef idx="minor">
+            <a:schemeClr val="lt1"/>
+          </a:fontRef>
+        </p:style>
+        <p:txBody>
+          <a:bodyPr wrap="square" rtlCol="0" anchor="ctr">
+            <a:noAutofit/>
+          </a:bodyPr>
+          <a:lstStyle/>
+          <a:p>
+            <a:pPr algn="ctr"/>
+            <a:endParaRPr lang="en-US"/>
+          </a:p>
+        </p:txBody>
+      </p:sp>
+      <p:pic>
+        <p:nvPicPr>
+          <p:cNvPr id="7" name="Picture 6">
+            <a:extLst>
+              <a:ext uri="{FF2B5EF4-FFF2-40B4-BE49-F238E27FC236}">
+                <a16:creationId xmlns:a16="http://schemas.microsoft.com/office/drawing/2014/main" id="{DF5E9412-025B-4B5D-AE93-6DA434EC7F70}"/>
+              </a:ext>
+            </a:extLst>
+          </p:cNvPr>
+          <p:cNvPicPr>
+            <a:picLocks noChangeAspect="1"/>
+          </p:cNvPicPr>
+          <p:nvPr/>
+        </p:nvPicPr>
+        <p:blipFill>
+          <a:blip r:embed="rId3">
+            <a:extLst>
+              <a:ext uri="{28A0092B-C50C-407E-A947-70E740481C1C}">
+                <a14:useLocalDpi xmlns:a14="http://schemas.microsoft.com/office/drawing/2010/main" val="0"/>
+              </a:ext>
+            </a:extLst>
+          </a:blip>
+          <a:stretch>
+            <a:fillRect/>
+          </a:stretch>
+        </p:blipFill>
+        <p:spPr>
+          <a:xfrm>
+            <a:off x="698353" y="3861948"/>
+            <a:ext cx="4555700" cy="2061454"/>
+          </a:xfrm>
+          <a:custGeom>
+            <a:avLst/>
+            <a:gdLst/>
+            <a:ahLst/>
+            <a:cxnLst/>
+            <a:rect l="l" t="t" r="r" b="b"/>
+            <a:pathLst>
+              <a:path w="4438338" h="2323972">
+                <a:moveTo>
+                  <a:pt x="69905" y="0"/>
+                </a:moveTo>
+                <a:lnTo>
+                  <a:pt x="4368433" y="0"/>
+                </a:lnTo>
+                <a:cubicBezTo>
+                  <a:pt x="4407040" y="0"/>
+                  <a:pt x="4438338" y="31298"/>
+                  <a:pt x="4438338" y="69905"/>
+                </a:cubicBezTo>
+                <a:lnTo>
+                  <a:pt x="4438338" y="2254067"/>
+                </a:lnTo>
+                <a:cubicBezTo>
+                  <a:pt x="4438338" y="2292674"/>
+                  <a:pt x="4407040" y="2323972"/>
+                  <a:pt x="4368433" y="2323972"/>
+                </a:cubicBezTo>
+                <a:lnTo>
+                  <a:pt x="69905" y="2323972"/>
+                </a:lnTo>
+                <a:cubicBezTo>
+                  <a:pt x="31298" y="2323972"/>
+                  <a:pt x="0" y="2292674"/>
+                  <a:pt x="0" y="2254067"/>
+                </a:cubicBezTo>
+                <a:lnTo>
+                  <a:pt x="0" y="69905"/>
+                </a:lnTo>
+                <a:cubicBezTo>
+                  <a:pt x="0" y="31298"/>
+                  <a:pt x="31298" y="0"/>
+                  <a:pt x="69905" y="0"/>
+                </a:cubicBezTo>
+                <a:close/>
+              </a:path>
+            </a:pathLst>
+          </a:custGeom>
+        </p:spPr>
+      </p:pic>
       <p:sp>
         <p:nvSpPr>
           <p:cNvPr id="3" name="Content Placeholder 2">
@@ -3964,10 +5328,15 @@
             <p:ph idx="1"/>
           </p:nvPr>
         </p:nvSpPr>
-        <p:spPr/>
+        <p:spPr>
+          <a:xfrm>
+            <a:off x="6151294" y="1946684"/>
+            <a:ext cx="5397237" cy="4351338"/>
+          </a:xfrm>
+        </p:spPr>
         <p:txBody>
           <a:bodyPr>
-            <a:normAutofit lnSpcReduction="10000"/>
+            <a:normAutofit/>
           </a:bodyPr>
           <a:lstStyle/>
           <a:p>
@@ -3975,7 +5344,7 @@
               <a:buNone/>
             </a:pPr>
             <a:r>
-              <a:rPr lang="en-GB" dirty="0"/>
+              <a:rPr lang="en-GB" sz="1500"/>
               <a:t>The game uses unity ads within the game. </a:t>
             </a:r>
           </a:p>
@@ -3984,7 +5353,7 @@
               <a:buNone/>
             </a:pPr>
             <a:r>
-              <a:rPr lang="en-GB" dirty="0"/>
+              <a:rPr lang="en-GB" sz="1500"/>
               <a:t>	Banner ads in inventory</a:t>
             </a:r>
           </a:p>
@@ -3993,7 +5362,7 @@
               <a:buNone/>
             </a:pPr>
             <a:r>
-              <a:rPr lang="en-GB" dirty="0"/>
+              <a:rPr lang="en-GB" sz="1500"/>
               <a:t>	Rewarded ads for minigame tokens</a:t>
             </a:r>
           </a:p>
@@ -4002,7 +5371,7 @@
               <a:buNone/>
             </a:pPr>
             <a:r>
-              <a:rPr lang="en-GB" dirty="0"/>
+              <a:rPr lang="en-GB" sz="1500"/>
               <a:t>	Interstitial ads for collecting items</a:t>
             </a:r>
           </a:p>
@@ -4011,7 +5380,7 @@
               <a:buNone/>
             </a:pPr>
             <a:r>
-              <a:rPr lang="en-GB" dirty="0"/>
+              <a:rPr lang="en-GB" sz="1500"/>
               <a:t>Microtransactions have been added to the game.</a:t>
             </a:r>
           </a:p>
@@ -4020,7 +5389,7 @@
               <a:buNone/>
             </a:pPr>
             <a:r>
-              <a:rPr lang="en-GB" dirty="0"/>
+              <a:rPr lang="en-GB" sz="1500"/>
               <a:t>	Purchase premium currency (consumable)</a:t>
             </a:r>
           </a:p>
@@ -4029,7 +5398,7 @@
               <a:buNone/>
             </a:pPr>
             <a:r>
-              <a:rPr lang="en-GB" dirty="0"/>
+              <a:rPr lang="en-GB" sz="1500"/>
               <a:t>	Purchase no ads option (non-consumable)</a:t>
             </a:r>
           </a:p>
@@ -4038,7 +5407,7 @@
               <a:buNone/>
             </a:pPr>
             <a:r>
-              <a:rPr lang="en-GB" dirty="0"/>
+              <a:rPr lang="en-GB" sz="1500"/>
               <a:t>Third party vibrations</a:t>
             </a:r>
           </a:p>
@@ -4047,9 +5416,91 @@
               <a:buNone/>
             </a:pPr>
             <a:r>
-              <a:rPr lang="en-GB" dirty="0"/>
-              <a:t>	When completing a minigame there</a:t>
-            </a:r>
+              <a:rPr lang="en-GB" sz="1500"/>
+              <a:t>	When completing a minigame there is a long vibration</a:t>
+            </a:r>
+          </a:p>
+          <a:p>
+            <a:pPr marL="0" indent="0">
+              <a:buNone/>
+            </a:pPr>
+            <a:r>
+              <a:rPr lang="en-GB" sz="1500"/>
+              <a:t>	Collecting items result in a short vibration </a:t>
+            </a:r>
+          </a:p>
+          <a:p>
+            <a:pPr marL="0" indent="0">
+              <a:buNone/>
+            </a:pPr>
+            <a:r>
+              <a:rPr lang="en-GB" sz="1500"/>
+              <a:t>	Buying new pens results in a short burst of vibrations</a:t>
+            </a:r>
+          </a:p>
+        </p:txBody>
+      </p:sp>
+      <p:sp>
+        <p:nvSpPr>
+          <p:cNvPr id="16" name="Arc 15">
+            <a:extLst>
+              <a:ext uri="{FF2B5EF4-FFF2-40B4-BE49-F238E27FC236}">
+                <a16:creationId xmlns:a16="http://schemas.microsoft.com/office/drawing/2014/main" id="{533DF362-939D-4EEE-8DC4-6B54607E5611}"/>
+              </a:ext>
+              <a:ext uri="{C183D7F6-B498-43B3-948B-1728B52AA6E4}">
+                <adec:decorative xmlns:adec="http://schemas.microsoft.com/office/drawing/2017/decorative" val="1"/>
+              </a:ext>
+            </a:extLst>
+          </p:cNvPr>
+          <p:cNvSpPr>
+            <a:spLocks noGrp="1" noRot="1" noChangeAspect="1" noMove="1" noResize="1" noEditPoints="1" noAdjustHandles="1" noChangeArrowheads="1" noChangeShapeType="1" noTextEdit="1"/>
+          </p:cNvSpPr>
+          <p:nvPr>
+            <p:extLst>
+              <p:ext uri="{386F3935-93C4-4BCD-93E2-E3B085C9AB24}">
+                <p16:designElem xmlns:p16="http://schemas.microsoft.com/office/powerpoint/2015/main" val="1"/>
+              </p:ext>
+            </p:extLst>
+          </p:nvPr>
+        </p:nvSpPr>
+        <p:spPr>
+          <a:xfrm rot="1095198">
+            <a:off x="1539683" y="162676"/>
+            <a:ext cx="4083433" cy="4083433"/>
+          </a:xfrm>
+          <a:prstGeom prst="arc">
+            <a:avLst>
+              <a:gd name="adj1" fmla="val 17445962"/>
+              <a:gd name="adj2" fmla="val 0"/>
+            </a:avLst>
+          </a:prstGeom>
+          <a:ln w="127000" cap="rnd">
+            <a:solidFill>
+              <a:schemeClr val="accent4"/>
+            </a:solidFill>
+            <a:prstDash val="dash"/>
+          </a:ln>
+        </p:spPr>
+        <p:style>
+          <a:lnRef idx="1">
+            <a:schemeClr val="accent1"/>
+          </a:lnRef>
+          <a:fillRef idx="0">
+            <a:schemeClr val="accent1"/>
+          </a:fillRef>
+          <a:effectRef idx="0">
+            <a:schemeClr val="accent1"/>
+          </a:effectRef>
+          <a:fontRef idx="minor">
+            <a:schemeClr val="tx1"/>
+          </a:fontRef>
+        </p:style>
+        <p:txBody>
+          <a:bodyPr rtlCol="0" anchor="ctr"/>
+          <a:lstStyle/>
+          <a:p>
+            <a:pPr algn="ctr"/>
+            <a:endParaRPr lang="en-US" dirty="0"/>
           </a:p>
         </p:txBody>
       </p:sp>
@@ -4069,6 +5520,14 @@
 <file path=ppt/slides/slide7.xml><?xml version="1.0" encoding="utf-8"?>
 <p:sld xmlns:a="http://schemas.openxmlformats.org/drawingml/2006/main" xmlns:r="http://schemas.openxmlformats.org/officeDocument/2006/relationships" xmlns:p="http://schemas.openxmlformats.org/presentationml/2006/main">
   <p:cSld>
+    <p:bg>
+      <p:bgPr>
+        <a:solidFill>
+          <a:schemeClr val="bg1"/>
+        </a:solidFill>
+        <a:effectLst/>
+      </p:bgPr>
+    </p:bg>
     <p:spTree>
       <p:nvGrpSpPr>
         <p:cNvPr id="1" name=""/>
@@ -4083,6 +5542,66 @@
           <a:chExt cx="0" cy="0"/>
         </a:xfrm>
       </p:grpSpPr>
+      <p:sp useBgFill="1">
+        <p:nvSpPr>
+          <p:cNvPr id="12" name="Rectangle 11">
+            <a:extLst>
+              <a:ext uri="{FF2B5EF4-FFF2-40B4-BE49-F238E27FC236}">
+                <a16:creationId xmlns:a16="http://schemas.microsoft.com/office/drawing/2014/main" id="{17891482-C38A-4F0C-8183-0121632F0E47}"/>
+              </a:ext>
+              <a:ext uri="{C183D7F6-B498-43B3-948B-1728B52AA6E4}">
+                <adec:decorative xmlns:adec="http://schemas.microsoft.com/office/drawing/2017/decorative" val="1"/>
+              </a:ext>
+            </a:extLst>
+          </p:cNvPr>
+          <p:cNvSpPr>
+            <a:spLocks noGrp="1" noRot="1" noChangeAspect="1" noMove="1" noResize="1" noEditPoints="1" noAdjustHandles="1" noChangeArrowheads="1" noChangeShapeType="1" noTextEdit="1"/>
+          </p:cNvSpPr>
+          <p:nvPr>
+            <p:extLst>
+              <p:ext uri="{386F3935-93C4-4BCD-93E2-E3B085C9AB24}">
+                <p16:designElem xmlns:p16="http://schemas.microsoft.com/office/powerpoint/2015/main" val="1"/>
+              </p:ext>
+            </p:extLst>
+          </p:nvPr>
+        </p:nvSpPr>
+        <p:spPr>
+          <a:xfrm>
+            <a:off x="0" y="0"/>
+            <a:ext cx="12188952" cy="6858000"/>
+          </a:xfrm>
+          <a:prstGeom prst="rect">
+            <a:avLst/>
+          </a:prstGeom>
+          <a:ln>
+            <a:noFill/>
+          </a:ln>
+        </p:spPr>
+        <p:style>
+          <a:lnRef idx="2">
+            <a:schemeClr val="accent1">
+              <a:shade val="50000"/>
+            </a:schemeClr>
+          </a:lnRef>
+          <a:fillRef idx="1">
+            <a:schemeClr val="accent1"/>
+          </a:fillRef>
+          <a:effectRef idx="0">
+            <a:schemeClr val="accent1"/>
+          </a:effectRef>
+          <a:fontRef idx="minor">
+            <a:schemeClr val="lt1"/>
+          </a:fontRef>
+        </p:style>
+        <p:txBody>
+          <a:bodyPr rtlCol="0" anchor="ctr"/>
+          <a:lstStyle/>
+          <a:p>
+            <a:pPr algn="ctr"/>
+            <a:endParaRPr lang="en-US"/>
+          </a:p>
+        </p:txBody>
+      </p:sp>
       <p:sp>
         <p:nvSpPr>
           <p:cNvPr id="2" name="Title 1">
@@ -4099,18 +5618,186 @@
             <p:ph type="title"/>
           </p:nvPr>
         </p:nvSpPr>
-        <p:spPr/>
-        <p:txBody>
-          <a:bodyPr/>
-          <a:lstStyle/>
-          <a:p>
-            <a:r>
-              <a:rPr lang="en-GB" dirty="0"/>
+        <p:spPr>
+          <a:xfrm>
+            <a:off x="5430129" y="486184"/>
+            <a:ext cx="6118403" cy="1325563"/>
+          </a:xfrm>
+        </p:spPr>
+        <p:txBody>
+          <a:bodyPr>
+            <a:normAutofit/>
+          </a:bodyPr>
+          <a:lstStyle/>
+          <a:p>
+            <a:r>
+              <a:rPr lang="en-GB"/>
               <a:t>Publication</a:t>
             </a:r>
-          </a:p>
-        </p:txBody>
-      </p:sp>
+            <a:endParaRPr lang="en-GB" dirty="0"/>
+          </a:p>
+        </p:txBody>
+      </p:sp>
+      <p:pic>
+        <p:nvPicPr>
+          <p:cNvPr id="5" name="Picture 4">
+            <a:extLst>
+              <a:ext uri="{FF2B5EF4-FFF2-40B4-BE49-F238E27FC236}">
+                <a16:creationId xmlns:a16="http://schemas.microsoft.com/office/drawing/2014/main" id="{A25C4EC4-0825-45AA-1519-8F1ED0375AF5}"/>
+              </a:ext>
+            </a:extLst>
+          </p:cNvPr>
+          <p:cNvPicPr>
+            <a:picLocks noChangeAspect="1"/>
+          </p:cNvPicPr>
+          <p:nvPr/>
+        </p:nvPicPr>
+        <p:blipFill>
+          <a:blip r:embed="rId2">
+            <a:extLst>
+              <a:ext uri="{28A0092B-C50C-407E-A947-70E740481C1C}">
+                <a14:useLocalDpi xmlns:a14="http://schemas.microsoft.com/office/drawing/2010/main" val="0"/>
+              </a:ext>
+            </a:extLst>
+          </a:blip>
+          <a:stretch>
+            <a:fillRect/>
+          </a:stretch>
+        </p:blipFill>
+        <p:spPr>
+          <a:xfrm>
+            <a:off x="643466" y="843852"/>
+            <a:ext cx="4100921" cy="2019703"/>
+          </a:xfrm>
+          <a:custGeom>
+            <a:avLst/>
+            <a:gdLst/>
+            <a:ahLst/>
+            <a:cxnLst/>
+            <a:rect l="l" t="t" r="r" b="b"/>
+            <a:pathLst>
+              <a:path w="4114800" h="5712488">
+                <a:moveTo>
+                  <a:pt x="133155" y="0"/>
+                </a:moveTo>
+                <a:lnTo>
+                  <a:pt x="3981645" y="0"/>
+                </a:lnTo>
+                <a:cubicBezTo>
+                  <a:pt x="4055184" y="0"/>
+                  <a:pt x="4114800" y="59616"/>
+                  <a:pt x="4114800" y="133155"/>
+                </a:cubicBezTo>
+                <a:lnTo>
+                  <a:pt x="4114800" y="5579333"/>
+                </a:lnTo>
+                <a:cubicBezTo>
+                  <a:pt x="4114800" y="5652872"/>
+                  <a:pt x="4055184" y="5712488"/>
+                  <a:pt x="3981645" y="5712488"/>
+                </a:cubicBezTo>
+                <a:lnTo>
+                  <a:pt x="133155" y="5712488"/>
+                </a:lnTo>
+                <a:cubicBezTo>
+                  <a:pt x="59616" y="5712488"/>
+                  <a:pt x="0" y="5652872"/>
+                  <a:pt x="0" y="5579333"/>
+                </a:cubicBezTo>
+                <a:lnTo>
+                  <a:pt x="0" y="133155"/>
+                </a:lnTo>
+                <a:cubicBezTo>
+                  <a:pt x="0" y="59616"/>
+                  <a:pt x="59616" y="0"/>
+                  <a:pt x="133155" y="0"/>
+                </a:cubicBezTo>
+                <a:close/>
+              </a:path>
+            </a:pathLst>
+          </a:custGeom>
+        </p:spPr>
+      </p:pic>
+      <p:pic>
+        <p:nvPicPr>
+          <p:cNvPr id="7" name="Picture 6">
+            <a:extLst>
+              <a:ext uri="{FF2B5EF4-FFF2-40B4-BE49-F238E27FC236}">
+                <a16:creationId xmlns:a16="http://schemas.microsoft.com/office/drawing/2014/main" id="{E46191D5-A122-C6A0-BE7E-6765DD73BE3C}"/>
+              </a:ext>
+            </a:extLst>
+          </p:cNvPr>
+          <p:cNvPicPr>
+            <a:picLocks noChangeAspect="1"/>
+          </p:cNvPicPr>
+          <p:nvPr/>
+        </p:nvPicPr>
+        <p:blipFill>
+          <a:blip r:embed="rId3">
+            <a:extLst>
+              <a:ext uri="{28A0092B-C50C-407E-A947-70E740481C1C}">
+                <a14:useLocalDpi xmlns:a14="http://schemas.microsoft.com/office/drawing/2010/main" val="0"/>
+              </a:ext>
+            </a:extLst>
+          </a:blip>
+          <a:stretch>
+            <a:fillRect/>
+          </a:stretch>
+        </p:blipFill>
+        <p:spPr>
+          <a:xfrm>
+            <a:off x="671966" y="3875723"/>
+            <a:ext cx="4072421" cy="2148202"/>
+          </a:xfrm>
+          <a:custGeom>
+            <a:avLst/>
+            <a:gdLst/>
+            <a:ahLst/>
+            <a:cxnLst/>
+            <a:rect l="l" t="t" r="r" b="b"/>
+            <a:pathLst>
+              <a:path w="4114800" h="5712488">
+                <a:moveTo>
+                  <a:pt x="133155" y="0"/>
+                </a:moveTo>
+                <a:lnTo>
+                  <a:pt x="3981645" y="0"/>
+                </a:lnTo>
+                <a:cubicBezTo>
+                  <a:pt x="4055184" y="0"/>
+                  <a:pt x="4114800" y="59616"/>
+                  <a:pt x="4114800" y="133155"/>
+                </a:cubicBezTo>
+                <a:lnTo>
+                  <a:pt x="4114800" y="5579333"/>
+                </a:lnTo>
+                <a:cubicBezTo>
+                  <a:pt x="4114800" y="5652872"/>
+                  <a:pt x="4055184" y="5712488"/>
+                  <a:pt x="3981645" y="5712488"/>
+                </a:cubicBezTo>
+                <a:lnTo>
+                  <a:pt x="133155" y="5712488"/>
+                </a:lnTo>
+                <a:cubicBezTo>
+                  <a:pt x="59616" y="5712488"/>
+                  <a:pt x="0" y="5652872"/>
+                  <a:pt x="0" y="5579333"/>
+                </a:cubicBezTo>
+                <a:lnTo>
+                  <a:pt x="0" y="133155"/>
+                </a:lnTo>
+                <a:cubicBezTo>
+                  <a:pt x="0" y="59616"/>
+                  <a:pt x="59616" y="0"/>
+                  <a:pt x="133155" y="0"/>
+                </a:cubicBezTo>
+                <a:close/>
+              </a:path>
+            </a:pathLst>
+          </a:custGeom>
+        </p:spPr>
+      </p:pic>
       <p:sp>
         <p:nvSpPr>
           <p:cNvPr id="3" name="Content Placeholder 2">
@@ -4127,9 +5814,16 @@
             <p:ph idx="1"/>
           </p:nvPr>
         </p:nvSpPr>
-        <p:spPr/>
-        <p:txBody>
-          <a:bodyPr/>
+        <p:spPr>
+          <a:xfrm>
+            <a:off x="5430129" y="1946684"/>
+            <a:ext cx="6118403" cy="4351338"/>
+          </a:xfrm>
+        </p:spPr>
+        <p:txBody>
+          <a:bodyPr>
+            <a:normAutofit/>
+          </a:bodyPr>
           <a:lstStyle/>
           <a:p>
             <a:r>
@@ -4142,6 +5836,113 @@
               <a:rPr lang="en-GB" dirty="0"/>
               <a:t>The game is within the testing phase on the google play console</a:t>
             </a:r>
+          </a:p>
+          <a:p>
+            <a:r>
+              <a:rPr lang="en-GB" dirty="0"/>
+              <a:t>Project available on </a:t>
+            </a:r>
+            <a:r>
+              <a:rPr lang="en-GB" dirty="0" err="1"/>
+              <a:t>github</a:t>
+            </a:r>
+            <a:r>
+              <a:rPr lang="en-GB" dirty="0"/>
+              <a:t>.</a:t>
+            </a:r>
+          </a:p>
+        </p:txBody>
+      </p:sp>
+      <p:sp>
+        <p:nvSpPr>
+          <p:cNvPr id="14" name="Arc 13">
+            <a:extLst>
+              <a:ext uri="{FF2B5EF4-FFF2-40B4-BE49-F238E27FC236}">
+                <a16:creationId xmlns:a16="http://schemas.microsoft.com/office/drawing/2014/main" id="{DA4B6E73-2318-4814-8EB1-306D53723691}"/>
+              </a:ext>
+              <a:ext uri="{C183D7F6-B498-43B3-948B-1728B52AA6E4}">
+                <adec:decorative xmlns:adec="http://schemas.microsoft.com/office/drawing/2017/decorative" val="1"/>
+              </a:ext>
+            </a:extLst>
+          </p:cNvPr>
+          <p:cNvSpPr>
+            <a:spLocks noGrp="1" noRot="1" noChangeAspect="1" noMove="1" noResize="1" noEditPoints="1" noAdjustHandles="1" noChangeArrowheads="1" noChangeShapeType="1" noTextEdit="1"/>
+          </p:cNvSpPr>
+          <p:nvPr>
+            <p:extLst>
+              <p:ext uri="{386F3935-93C4-4BCD-93E2-E3B085C9AB24}">
+                <p16:designElem xmlns:p16="http://schemas.microsoft.com/office/powerpoint/2015/main" val="1"/>
+              </p:ext>
+            </p:extLst>
+          </p:nvPr>
+        </p:nvSpPr>
+        <p:spPr>
+          <a:xfrm rot="21064111">
+            <a:off x="-991925" y="5644752"/>
+            <a:ext cx="2987899" cy="2987899"/>
+          </a:xfrm>
+          <a:prstGeom prst="arc">
+            <a:avLst>
+              <a:gd name="adj1" fmla="val 16200000"/>
+              <a:gd name="adj2" fmla="val 21581479"/>
+            </a:avLst>
+          </a:prstGeom>
+          <a:ln w="127000" cap="rnd">
+            <a:solidFill>
+              <a:schemeClr val="accent4"/>
+            </a:solidFill>
+            <a:prstDash val="dash"/>
+          </a:ln>
+        </p:spPr>
+        <p:style>
+          <a:lnRef idx="1">
+            <a:schemeClr val="accent1"/>
+          </a:lnRef>
+          <a:fillRef idx="0">
+            <a:schemeClr val="accent1"/>
+          </a:fillRef>
+          <a:effectRef idx="0">
+            <a:schemeClr val="accent1"/>
+          </a:effectRef>
+          <a:fontRef idx="minor">
+            <a:schemeClr val="tx1"/>
+          </a:fontRef>
+        </p:style>
+        <p:txBody>
+          <a:bodyPr rtlCol="0" anchor="ctr"/>
+          <a:lstStyle/>
+          <a:p>
+            <a:pPr marL="0" marR="0" lvl="0" indent="0" algn="ctr" defTabSz="914400" rtl="0" eaLnBrk="1" fontAlgn="auto" latinLnBrk="0" hangingPunct="1">
+              <a:lnSpc>
+                <a:spcPct val="100000"/>
+              </a:lnSpc>
+              <a:spcBef>
+                <a:spcPts val="0"/>
+              </a:spcBef>
+              <a:spcAft>
+                <a:spcPts val="0"/>
+              </a:spcAft>
+              <a:buClrTx/>
+              <a:buSzTx/>
+              <a:buFontTx/>
+              <a:buNone/>
+              <a:tabLst/>
+              <a:defRPr/>
+            </a:pPr>
+            <a:endParaRPr kumimoji="0" lang="en-US" sz="1800" b="0" i="0" u="none" strike="noStrike" kern="1200" cap="none" spc="0" normalizeH="0" baseline="0" noProof="0">
+              <a:ln>
+                <a:noFill/>
+              </a:ln>
+              <a:solidFill>
+                <a:srgbClr val="000000"/>
+              </a:solidFill>
+              <a:effectLst/>
+              <a:uLnTx/>
+              <a:uFillTx/>
+              <a:latin typeface="Calibri" panose="020F0502020204030204"/>
+              <a:ea typeface="+mn-ea"/>
+              <a:cs typeface="+mn-cs"/>
+            </a:endParaRPr>
           </a:p>
         </p:txBody>
       </p:sp>
